--- a/preview_v7/cn/l-cn-bx-u1-5.pptx
+++ b/preview_v7/cn/l-cn-bx-u1-5.pptx
@@ -3111,7 +3111,7 @@
             <a:avLst/>
           </a:prstGeom>
           <a:solidFill>
-            <a:srgbClr val="F4EFE6"/>
+            <a:srgbClr val="1C2A33"/>
           </a:solidFill>
           <a:ln>
             <a:noFill/>
@@ -3142,177 +3142,14 @@
       </p:sp>
       <p:sp>
         <p:nvSpPr>
-          <p:cNvPr id="3" name="TextBox 2"/>
-          <p:cNvSpPr txBox="1"/>
-          <p:nvPr/>
-        </p:nvSpPr>
-        <p:spPr>
-          <a:xfrm>
-            <a:off x="640080" y="640080"/>
-            <a:ext cx="10911535" cy="502920"/>
-          </a:xfrm>
-          <a:prstGeom prst="rect">
-            <a:avLst/>
-          </a:prstGeom>
-          <a:noFill/>
-        </p:spPr>
-        <p:txBody>
-          <a:bodyPr wrap="square" anchor="t" lIns="0" rIns="0" tIns="0" bIns="0">
-            <a:spAutoFit/>
-          </a:bodyPr>
-          <a:lstStyle/>
-          <a:p>
-            <a:pPr algn="l">
-              <a:spcAft>
-                <a:spcPts val="0"/>
-              </a:spcAft>
-            </a:pPr>
-            <a:r>
-              <a:rPr sz="1200" b="1">
-                <a:solidFill>
-                  <a:srgbClr val="B23A2A"/>
-                </a:solidFill>
-                <a:latin typeface="微软雅黑"/>
-                <a:ea typeface="微软雅黑"/>
-                <a:cs typeface="微软雅黑"/>
-              </a:rPr>
-              <a:t>语文 · 必修下册 · 第1单元 中华传统文化经典</a:t>
-            </a:r>
-          </a:p>
-        </p:txBody>
-      </p:sp>
-      <p:sp>
-        <p:nvSpPr>
-          <p:cNvPr id="4" name="Rectangle 3"/>
+          <p:cNvPr id="3" name="Rectangle 2"/>
           <p:cNvSpPr/>
           <p:nvPr/>
         </p:nvSpPr>
         <p:spPr>
           <a:xfrm>
-            <a:off x="640080" y="1207008"/>
-            <a:ext cx="822960" cy="30480"/>
-          </a:xfrm>
-          <a:prstGeom prst="rect">
-            <a:avLst/>
-          </a:prstGeom>
-          <a:solidFill>
-            <a:srgbClr val="B23A2A"/>
-          </a:solidFill>
-          <a:ln>
-            <a:noFill/>
-          </a:ln>
-          <a:effectLst/>
-        </p:spPr>
-        <p:style>
-          <a:lnRef idx="1">
-            <a:schemeClr val="accent1"/>
-          </a:lnRef>
-          <a:fillRef idx="3">
-            <a:schemeClr val="accent1"/>
-          </a:fillRef>
-          <a:effectRef idx="2">
-            <a:schemeClr val="accent1"/>
-          </a:effectRef>
-          <a:fontRef idx="minor">
-            <a:schemeClr val="lt1"/>
-          </a:fontRef>
-        </p:style>
-        <p:txBody>
-          <a:bodyPr rtlCol="0" anchor="ctr"/>
-          <a:lstStyle/>
-          <a:p>
-            <a:pPr algn="ctr"/>
-          </a:p>
-        </p:txBody>
-      </p:sp>
-      <p:sp>
-        <p:nvSpPr>
-          <p:cNvPr id="5" name="TextBox 4"/>
-          <p:cNvSpPr txBox="1"/>
-          <p:nvPr/>
-        </p:nvSpPr>
-        <p:spPr>
-          <a:xfrm>
-            <a:off x="640080" y="1737360"/>
-            <a:ext cx="10911535" cy="2011680"/>
-          </a:xfrm>
-          <a:prstGeom prst="rect">
-            <a:avLst/>
-          </a:prstGeom>
-          <a:noFill/>
-        </p:spPr>
-        <p:txBody>
-          <a:bodyPr wrap="square" anchor="t" lIns="0" rIns="0" tIns="0" bIns="0">
-            <a:spAutoFit/>
-          </a:bodyPr>
-          <a:lstStyle/>
-          <a:p>
-            <a:pPr algn="l">
-              <a:lnSpc>
-                <a:spcPct val="115000"/>
-              </a:lnSpc>
-            </a:pPr>
-            <a:r>
-              <a:rPr sz="4000" b="1">
-                <a:solidFill>
-                  <a:srgbClr val="1C2A33"/>
-                </a:solidFill>
-                <a:latin typeface="楷体"/>
-                <a:ea typeface="楷体"/>
-                <a:cs typeface="楷体"/>
-              </a:rPr>
-              <a:t>鸿门宴 精读——史记笔法与人物的冲突</a:t>
-            </a:r>
-          </a:p>
-        </p:txBody>
-      </p:sp>
-      <p:sp>
-        <p:nvSpPr>
-          <p:cNvPr id="6" name="TextBox 5"/>
-          <p:cNvSpPr txBox="1"/>
-          <p:nvPr/>
-        </p:nvSpPr>
-        <p:spPr>
-          <a:xfrm>
-            <a:off x="640080" y="3840480"/>
-            <a:ext cx="10911535" cy="457200"/>
-          </a:xfrm>
-          <a:prstGeom prst="rect">
-            <a:avLst/>
-          </a:prstGeom>
-          <a:noFill/>
-        </p:spPr>
-        <p:txBody>
-          <a:bodyPr wrap="square" anchor="t" lIns="0" rIns="0" tIns="0" bIns="0">
-            <a:spAutoFit/>
-          </a:bodyPr>
-          <a:lstStyle/>
-          <a:p>
-            <a:pPr algn="l"/>
-            <a:r>
-              <a:rPr sz="1700" b="1">
-                <a:solidFill>
-                  <a:srgbClr val="B23A2A"/>
-                </a:solidFill>
-                <a:latin typeface="微软雅黑"/>
-                <a:ea typeface="微软雅黑"/>
-                <a:cs typeface="微软雅黑"/>
-              </a:rPr>
-              <a:t>课文精读  ·  第5课时  ·  45分钟</a:t>
-            </a:r>
-          </a:p>
-        </p:txBody>
-      </p:sp>
-      <p:sp>
-        <p:nvSpPr>
-          <p:cNvPr id="7" name="Rectangle 6"/>
-          <p:cNvSpPr/>
-          <p:nvPr/>
-        </p:nvSpPr>
-        <p:spPr>
-          <a:xfrm>
-            <a:off x="640080" y="5394960"/>
-            <a:ext cx="2011680" cy="33020"/>
+            <a:off x="640080" y="960120"/>
+            <a:ext cx="822960" cy="38100"/>
           </a:xfrm>
           <a:prstGeom prst="rect">
             <a:avLst/>
@@ -3349,14 +3186,14 @@
       </p:sp>
       <p:sp>
         <p:nvSpPr>
-          <p:cNvPr id="8" name="TextBox 7"/>
+          <p:cNvPr id="4" name="TextBox 3"/>
           <p:cNvSpPr txBox="1"/>
           <p:nvPr/>
         </p:nvSpPr>
         <p:spPr>
           <a:xfrm>
-            <a:off x="640080" y="5623560"/>
-            <a:ext cx="10911535" cy="548640"/>
+            <a:off x="640080" y="1143000"/>
+            <a:ext cx="10515600" cy="457200"/>
           </a:xfrm>
           <a:prstGeom prst="rect">
             <a:avLst/>
@@ -3371,29 +3208,29 @@
           <a:p>
             <a:pPr algn="l"/>
             <a:r>
-              <a:rPr sz="1400" b="0">
-                <a:solidFill>
-                  <a:srgbClr val="6B6258"/>
+              <a:rPr sz="1500" b="1">
+                <a:solidFill>
+                  <a:srgbClr val="C8A86B"/>
                 </a:solidFill>
                 <a:latin typeface="微软雅黑"/>
                 <a:ea typeface="微软雅黑"/>
                 <a:cs typeface="微软雅黑"/>
               </a:rPr>
-              <a:t>学习任务群：思辨性阅读与表达    |    年级：高一</a:t>
-            </a:r>
-          </a:p>
-        </p:txBody>
-      </p:sp>
-      <p:sp>
-        <p:nvSpPr>
-          <p:cNvPr id="9" name="TextBox 8"/>
+              <a:t>必修下册 · 第1单元《中华传统文化经典》· 第5课时</a:t>
+            </a:r>
+          </a:p>
+        </p:txBody>
+      </p:sp>
+      <p:sp>
+        <p:nvSpPr>
+          <p:cNvPr id="5" name="TextBox 4"/>
           <p:cNvSpPr txBox="1"/>
           <p:nvPr/>
         </p:nvSpPr>
         <p:spPr>
           <a:xfrm>
-            <a:off x="11002975" y="6355080"/>
-            <a:ext cx="731520" cy="320040"/>
+            <a:off x="640080" y="1600200"/>
+            <a:ext cx="11247120" cy="1828800"/>
           </a:xfrm>
           <a:prstGeom prst="rect">
             <a:avLst/>
@@ -3406,11 +3243,107 @@
           </a:bodyPr>
           <a:lstStyle/>
           <a:p>
+            <a:pPr algn="l">
+              <a:lnSpc>
+                <a:spcPct val="130000"/>
+              </a:lnSpc>
+            </a:pPr>
+            <a:r>
+              <a:rPr sz="3200" b="1">
+                <a:solidFill>
+                  <a:srgbClr val="FFFFFF"/>
+                </a:solidFill>
+                <a:latin typeface="楷体"/>
+                <a:ea typeface="楷体"/>
+                <a:cs typeface="楷体"/>
+              </a:rPr>
+              <a:t>鸿门宴 精读——史记笔法与人物的冲突</a:t>
+            </a:r>
+          </a:p>
+        </p:txBody>
+      </p:sp>
+      <p:sp>
+        <p:nvSpPr>
+          <p:cNvPr id="6" name="TextBox 5"/>
+          <p:cNvSpPr txBox="1"/>
+          <p:nvPr/>
+        </p:nvSpPr>
+        <p:spPr>
+          <a:xfrm>
+            <a:off x="640080" y="3611880"/>
+            <a:ext cx="10972800" cy="1280160"/>
+          </a:xfrm>
+          <a:prstGeom prst="rect">
+            <a:avLst/>
+          </a:prstGeom>
+          <a:noFill/>
+        </p:spPr>
+        <p:txBody>
+          <a:bodyPr wrap="square" anchor="t" lIns="0" rIns="0" tIns="0" bIns="0">
+            <a:spAutoFit/>
+          </a:bodyPr>
+          <a:lstStyle/>
+          <a:p>
+            <a:pPr algn="l">
+              <a:lnSpc>
+                <a:spcPct val="150000"/>
+              </a:lnSpc>
+            </a:pPr>
+            <a:r>
+              <a:rPr sz="1800" b="0">
+                <a:solidFill>
+                  <a:srgbClr val="E7DFD2"/>
+                </a:solidFill>
+                <a:latin typeface="楷体"/>
+                <a:ea typeface="楷体"/>
+                <a:cs typeface="楷体"/>
+              </a:rPr>
+              <a:t>把读到的经典，变成自己的眼光与方法。</a:t>
+            </a:r>
+          </a:p>
+          <a:p>
+            <a:pPr algn="l"/>
+            <a:r>
+              <a:rPr sz="1200" b="0">
+                <a:solidFill>
+                  <a:srgbClr val="6B6258"/>
+                </a:solidFill>
+                <a:latin typeface="微软雅黑"/>
+                <a:ea typeface="微软雅黑"/>
+                <a:cs typeface="微软雅黑"/>
+              </a:rPr>
+              <a:t>本课件未使用无关配图，以学科色块呈现。</a:t>
+            </a:r>
+          </a:p>
+        </p:txBody>
+      </p:sp>
+      <p:sp>
+        <p:nvSpPr>
+          <p:cNvPr id="7" name="TextBox 6"/>
+          <p:cNvSpPr txBox="1"/>
+          <p:nvPr/>
+        </p:nvSpPr>
+        <p:spPr>
+          <a:xfrm>
+            <a:off x="11002975" y="6355080"/>
+            <a:ext cx="731520" cy="320040"/>
+          </a:xfrm>
+          <a:prstGeom prst="rect">
+            <a:avLst/>
+          </a:prstGeom>
+          <a:noFill/>
+        </p:spPr>
+        <p:txBody>
+          <a:bodyPr wrap="square" anchor="t" lIns="0" rIns="0" tIns="0" bIns="0">
+            <a:spAutoFit/>
+          </a:bodyPr>
+          <a:lstStyle/>
+          <a:p>
             <a:pPr algn="r"/>
             <a:r>
               <a:rPr sz="1100" b="0">
                 <a:solidFill>
-                  <a:srgbClr val="6B6258"/>
+                  <a:srgbClr val="FFFFFF"/>
                 </a:solidFill>
                 <a:latin typeface="微软雅黑"/>
                 <a:ea typeface="微软雅黑"/>
@@ -3519,7 +3452,7 @@
                 <a:ea typeface="微软雅黑"/>
                 <a:cs typeface="微软雅黑"/>
               </a:rPr>
-              <a:t>学习目标</a:t>
+              <a:t>本课目标</a:t>
             </a:r>
           </a:p>
         </p:txBody>
@@ -3570,14 +3503,51 @@
       </p:sp>
       <p:sp>
         <p:nvSpPr>
-          <p:cNvPr id="5" name="Rounded Rectangle 4"/>
+          <p:cNvPr id="5" name="TextBox 4"/>
+          <p:cNvSpPr txBox="1"/>
+          <p:nvPr/>
+        </p:nvSpPr>
+        <p:spPr>
+          <a:xfrm>
+            <a:off x="640080" y="1325880"/>
+            <a:ext cx="10058400" cy="548640"/>
+          </a:xfrm>
+          <a:prstGeom prst="rect">
+            <a:avLst/>
+          </a:prstGeom>
+          <a:noFill/>
+        </p:spPr>
+        <p:txBody>
+          <a:bodyPr wrap="square" anchor="t" lIns="0" rIns="0" tIns="0" bIns="0">
+            <a:spAutoFit/>
+          </a:bodyPr>
+          <a:lstStyle/>
+          <a:p>
+            <a:pPr algn="l"/>
+            <a:r>
+              <a:rPr sz="3000" b="1">
+                <a:solidFill>
+                  <a:srgbClr val="1C2A33"/>
+                </a:solidFill>
+                <a:latin typeface="楷体"/>
+                <a:ea typeface="楷体"/>
+                <a:cs typeface="楷体"/>
+              </a:rPr>
+              <a:t>四向学习目标</a:t>
+            </a:r>
+          </a:p>
+        </p:txBody>
+      </p:sp>
+      <p:sp>
+        <p:nvSpPr>
+          <p:cNvPr id="6" name="Rounded Rectangle 5"/>
           <p:cNvSpPr/>
           <p:nvPr/>
         </p:nvSpPr>
         <p:spPr>
           <a:xfrm>
-            <a:off x="640080" y="1417320"/>
-            <a:ext cx="5349240" cy="2057400"/>
+            <a:off x="640080" y="2331720"/>
+            <a:ext cx="2453563" cy="3474720"/>
           </a:xfrm>
           <a:prstGeom prst="roundRect">
             <a:avLst/>
@@ -3585,7 +3555,7 @@
           <a:solidFill>
             <a:srgbClr val="FFFFFF"/>
           </a:solidFill>
-          <a:ln w="22860">
+          <a:ln w="20320">
             <a:solidFill>
               <a:srgbClr val="B23A2A"/>
             </a:solidFill>
@@ -3616,14 +3586,14 @@
       </p:sp>
       <p:sp>
         <p:nvSpPr>
-          <p:cNvPr id="6" name="Oval 5"/>
+          <p:cNvPr id="7" name="Oval 6"/>
           <p:cNvSpPr/>
           <p:nvPr/>
         </p:nvSpPr>
         <p:spPr>
           <a:xfrm>
-            <a:off x="804672" y="1581912"/>
-            <a:ext cx="457200" cy="457200"/>
+            <a:off x="1455381" y="2651760"/>
+            <a:ext cx="822960" cy="822960"/>
           </a:xfrm>
           <a:prstGeom prst="ellipse">
             <a:avLst/>
@@ -3660,14 +3630,14 @@
       </p:sp>
       <p:sp>
         <p:nvSpPr>
-          <p:cNvPr id="7" name="TextBox 6"/>
+          <p:cNvPr id="8" name="TextBox 7"/>
           <p:cNvSpPr txBox="1"/>
           <p:nvPr/>
         </p:nvSpPr>
         <p:spPr>
           <a:xfrm>
-            <a:off x="804672" y="1636776"/>
-            <a:ext cx="457200" cy="384048"/>
+            <a:off x="1455381" y="2834640"/>
+            <a:ext cx="822960" cy="457200"/>
           </a:xfrm>
           <a:prstGeom prst="rect">
             <a:avLst/>
@@ -3682,29 +3652,66 @@
           <a:p>
             <a:pPr algn="ctr"/>
             <a:r>
-              <a:rPr sz="1600" b="1">
+              <a:rPr sz="2400" b="1">
                 <a:solidFill>
                   <a:srgbClr val="FFFFFF"/>
+                </a:solidFill>
+                <a:latin typeface="楷体"/>
+                <a:ea typeface="楷体"/>
+                <a:cs typeface="楷体"/>
+              </a:rPr>
+              <a:t>1</a:t>
+            </a:r>
+          </a:p>
+        </p:txBody>
+      </p:sp>
+      <p:sp>
+        <p:nvSpPr>
+          <p:cNvPr id="9" name="TextBox 8"/>
+          <p:cNvSpPr txBox="1"/>
+          <p:nvPr/>
+        </p:nvSpPr>
+        <p:spPr>
+          <a:xfrm>
+            <a:off x="822960" y="3703320"/>
+            <a:ext cx="2087803" cy="548640"/>
+          </a:xfrm>
+          <a:prstGeom prst="rect">
+            <a:avLst/>
+          </a:prstGeom>
+          <a:noFill/>
+        </p:spPr>
+        <p:txBody>
+          <a:bodyPr wrap="square" anchor="t" lIns="0" rIns="0" tIns="0" bIns="0">
+            <a:spAutoFit/>
+          </a:bodyPr>
+          <a:lstStyle/>
+          <a:p>
+            <a:pPr algn="ctr"/>
+            <a:r>
+              <a:rPr sz="1700" b="1">
+                <a:solidFill>
+                  <a:srgbClr val="B23A2A"/>
                 </a:solidFill>
                 <a:latin typeface="微软雅黑"/>
                 <a:ea typeface="微软雅黑"/>
                 <a:cs typeface="微软雅黑"/>
               </a:rPr>
-              <a:t>1</a:t>
-            </a:r>
-          </a:p>
-        </p:txBody>
-      </p:sp>
-      <p:sp>
-        <p:nvSpPr>
-          <p:cNvPr id="8" name="TextBox 7"/>
+              <a:t>语言能力</a:t>
+            </a:r>
+          </a:p>
+        </p:txBody>
+      </p:sp>
+      <p:sp>
+        <p:nvSpPr>
+          <p:cNvPr id="10" name="TextBox 9"/>
           <p:cNvSpPr txBox="1"/>
           <p:nvPr/>
         </p:nvSpPr>
         <p:spPr>
           <a:xfrm>
-            <a:off x="1371600" y="1527048"/>
-            <a:ext cx="4434840" cy="457200"/>
+            <a:off x="841248" y="4297680"/>
+            <a:ext cx="2051227" cy="1371600"/>
           </a:xfrm>
           <a:prstGeom prst="rect">
             <a:avLst/>
@@ -3717,54 +3724,13 @@
           </a:bodyPr>
           <a:lstStyle/>
           <a:p>
-            <a:pPr algn="l">
+            <a:pPr algn="ctr">
               <a:lnSpc>
-                <a:spcPct val="110000"/>
+                <a:spcPct val="145000"/>
               </a:lnSpc>
             </a:pPr>
             <a:r>
-              <a:rPr sz="1600" b="1">
-                <a:solidFill>
-                  <a:srgbClr val="1C2A33"/>
-                </a:solidFill>
-                <a:latin typeface="微软雅黑"/>
-                <a:ea typeface="微软雅黑"/>
-                <a:cs typeface="微软雅黑"/>
-              </a:rPr>
-              <a:t>目标</a:t>
-            </a:r>
-          </a:p>
-        </p:txBody>
-      </p:sp>
-      <p:sp>
-        <p:nvSpPr>
-          <p:cNvPr id="9" name="TextBox 8"/>
-          <p:cNvSpPr txBox="1"/>
-          <p:nvPr/>
-        </p:nvSpPr>
-        <p:spPr>
-          <a:xfrm>
-            <a:off x="1371600" y="1965960"/>
-            <a:ext cx="4434840" cy="1417320"/>
-          </a:xfrm>
-          <a:prstGeom prst="rect">
-            <a:avLst/>
-          </a:prstGeom>
-          <a:noFill/>
-        </p:spPr>
-        <p:txBody>
-          <a:bodyPr wrap="square" anchor="t" lIns="0" rIns="0" tIns="0" bIns="0">
-            <a:spAutoFit/>
-          </a:bodyPr>
-          <a:lstStyle/>
-          <a:p>
-            <a:pPr algn="l">
-              <a:lnSpc>
-                <a:spcPct val="128000"/>
-              </a:lnSpc>
-            </a:pPr>
-            <a:r>
-              <a:rPr sz="1200" b="0">
+              <a:rPr sz="1300" b="0">
                 <a:solidFill>
                   <a:srgbClr val="1C2A33"/>
                 </a:solidFill>
@@ -3772,21 +3738,21 @@
                 <a:ea typeface="楷体"/>
                 <a:cs typeface="楷体"/>
               </a:rPr>
-              <a:t>语言能力：梳理鸿门宴情节（谢罪→举玦→舞剑→闯帐→遁走），解释关键词，说出主要人物性格。</a:t>
-            </a:r>
-          </a:p>
-        </p:txBody>
-      </p:sp>
-      <p:sp>
-        <p:nvSpPr>
-          <p:cNvPr id="10" name="Rounded Rectangle 9"/>
+              <a:t>梳理鸿门宴情节（谢罪→举玦→舞剑→闯帐→遁走），解释关键词，说出主要人物性格</a:t>
+            </a:r>
+          </a:p>
+        </p:txBody>
+      </p:sp>
+      <p:sp>
+        <p:nvSpPr>
+          <p:cNvPr id="11" name="Rounded Rectangle 10"/>
           <p:cNvSpPr/>
           <p:nvPr/>
         </p:nvSpPr>
         <p:spPr>
           <a:xfrm>
-            <a:off x="6263640" y="1417320"/>
-            <a:ext cx="5349240" cy="2057400"/>
+            <a:off x="3459403" y="2331720"/>
+            <a:ext cx="2453563" cy="3474720"/>
           </a:xfrm>
           <a:prstGeom prst="roundRect">
             <a:avLst/>
@@ -3794,9 +3760,9 @@
           <a:solidFill>
             <a:srgbClr val="FFFFFF"/>
           </a:solidFill>
-          <a:ln w="22860">
+          <a:ln w="20320">
             <a:solidFill>
-              <a:srgbClr val="B23A2A"/>
+              <a:srgbClr val="2E7D6B"/>
             </a:solidFill>
           </a:ln>
           <a:effectLst/>
@@ -3825,20 +3791,20 @@
       </p:sp>
       <p:sp>
         <p:nvSpPr>
-          <p:cNvPr id="11" name="Oval 10"/>
+          <p:cNvPr id="12" name="Oval 11"/>
           <p:cNvSpPr/>
           <p:nvPr/>
         </p:nvSpPr>
         <p:spPr>
           <a:xfrm>
-            <a:off x="6428232" y="1581912"/>
-            <a:ext cx="457200" cy="457200"/>
+            <a:off x="4274705" y="2651760"/>
+            <a:ext cx="822960" cy="822960"/>
           </a:xfrm>
           <a:prstGeom prst="ellipse">
             <a:avLst/>
           </a:prstGeom>
           <a:solidFill>
-            <a:srgbClr val="B23A2A"/>
+            <a:srgbClr val="2E7D6B"/>
           </a:solidFill>
           <a:ln>
             <a:noFill/>
@@ -3869,14 +3835,14 @@
       </p:sp>
       <p:sp>
         <p:nvSpPr>
-          <p:cNvPr id="12" name="TextBox 11"/>
+          <p:cNvPr id="13" name="TextBox 12"/>
           <p:cNvSpPr txBox="1"/>
           <p:nvPr/>
         </p:nvSpPr>
         <p:spPr>
           <a:xfrm>
-            <a:off x="6428232" y="1636776"/>
-            <a:ext cx="457200" cy="384048"/>
+            <a:off x="4274705" y="2834640"/>
+            <a:ext cx="822960" cy="457200"/>
           </a:xfrm>
           <a:prstGeom prst="rect">
             <a:avLst/>
@@ -3891,29 +3857,66 @@
           <a:p>
             <a:pPr algn="ctr"/>
             <a:r>
-              <a:rPr sz="1600" b="1">
+              <a:rPr sz="2400" b="1">
                 <a:solidFill>
                   <a:srgbClr val="FFFFFF"/>
+                </a:solidFill>
+                <a:latin typeface="楷体"/>
+                <a:ea typeface="楷体"/>
+                <a:cs typeface="楷体"/>
+              </a:rPr>
+              <a:t>2</a:t>
+            </a:r>
+          </a:p>
+        </p:txBody>
+      </p:sp>
+      <p:sp>
+        <p:nvSpPr>
+          <p:cNvPr id="14" name="TextBox 13"/>
+          <p:cNvSpPr txBox="1"/>
+          <p:nvPr/>
+        </p:nvSpPr>
+        <p:spPr>
+          <a:xfrm>
+            <a:off x="3642283" y="3703320"/>
+            <a:ext cx="2087803" cy="548640"/>
+          </a:xfrm>
+          <a:prstGeom prst="rect">
+            <a:avLst/>
+          </a:prstGeom>
+          <a:noFill/>
+        </p:spPr>
+        <p:txBody>
+          <a:bodyPr wrap="square" anchor="t" lIns="0" rIns="0" tIns="0" bIns="0">
+            <a:spAutoFit/>
+          </a:bodyPr>
+          <a:lstStyle/>
+          <a:p>
+            <a:pPr algn="ctr"/>
+            <a:r>
+              <a:rPr sz="1700" b="1">
+                <a:solidFill>
+                  <a:srgbClr val="2E7D6B"/>
                 </a:solidFill>
                 <a:latin typeface="微软雅黑"/>
                 <a:ea typeface="微软雅黑"/>
                 <a:cs typeface="微软雅黑"/>
               </a:rPr>
-              <a:t>2</a:t>
-            </a:r>
-          </a:p>
-        </p:txBody>
-      </p:sp>
-      <p:sp>
-        <p:nvSpPr>
-          <p:cNvPr id="13" name="TextBox 12"/>
+              <a:t>文化意识</a:t>
+            </a:r>
+          </a:p>
+        </p:txBody>
+      </p:sp>
+      <p:sp>
+        <p:nvSpPr>
+          <p:cNvPr id="15" name="TextBox 14"/>
           <p:cNvSpPr txBox="1"/>
           <p:nvPr/>
         </p:nvSpPr>
         <p:spPr>
           <a:xfrm>
-            <a:off x="6995160" y="1527048"/>
-            <a:ext cx="4434840" cy="457200"/>
+            <a:off x="3660571" y="4297680"/>
+            <a:ext cx="2051227" cy="1371600"/>
           </a:xfrm>
           <a:prstGeom prst="rect">
             <a:avLst/>
@@ -3926,54 +3929,13 @@
           </a:bodyPr>
           <a:lstStyle/>
           <a:p>
-            <a:pPr algn="l">
+            <a:pPr algn="ctr">
               <a:lnSpc>
-                <a:spcPct val="110000"/>
+                <a:spcPct val="145000"/>
               </a:lnSpc>
             </a:pPr>
             <a:r>
-              <a:rPr sz="1600" b="1">
-                <a:solidFill>
-                  <a:srgbClr val="1C2A33"/>
-                </a:solidFill>
-                <a:latin typeface="微软雅黑"/>
-                <a:ea typeface="微软雅黑"/>
-                <a:cs typeface="微软雅黑"/>
-              </a:rPr>
-              <a:t>目标</a:t>
-            </a:r>
-          </a:p>
-        </p:txBody>
-      </p:sp>
-      <p:sp>
-        <p:nvSpPr>
-          <p:cNvPr id="14" name="TextBox 13"/>
-          <p:cNvSpPr txBox="1"/>
-          <p:nvPr/>
-        </p:nvSpPr>
-        <p:spPr>
-          <a:xfrm>
-            <a:off x="6995160" y="1965960"/>
-            <a:ext cx="4434840" cy="1417320"/>
-          </a:xfrm>
-          <a:prstGeom prst="rect">
-            <a:avLst/>
-          </a:prstGeom>
-          <a:noFill/>
-        </p:spPr>
-        <p:txBody>
-          <a:bodyPr wrap="square" anchor="t" lIns="0" rIns="0" tIns="0" bIns="0">
-            <a:spAutoFit/>
-          </a:bodyPr>
-          <a:lstStyle/>
-          <a:p>
-            <a:pPr algn="l">
-              <a:lnSpc>
-                <a:spcPct val="128000"/>
-              </a:lnSpc>
-            </a:pPr>
-            <a:r>
-              <a:rPr sz="1400" b="0">
+              <a:rPr sz="1300" b="0">
                 <a:solidFill>
                   <a:srgbClr val="1C2A33"/>
                 </a:solidFill>
@@ -3981,21 +3943,21 @@
                 <a:ea typeface="楷体"/>
                 <a:cs typeface="楷体"/>
               </a:rPr>
-              <a:t>文化意识：体会《史记》「不虚美不隐恶」的实录精神与以人写史的叙事传统。</a:t>
-            </a:r>
-          </a:p>
-        </p:txBody>
-      </p:sp>
-      <p:sp>
-        <p:nvSpPr>
-          <p:cNvPr id="15" name="Rounded Rectangle 14"/>
+              <a:t>体会《史记》「不虚美不隐恶」的实录精神与以人写史的叙事传统</a:t>
+            </a:r>
+          </a:p>
+        </p:txBody>
+      </p:sp>
+      <p:sp>
+        <p:nvSpPr>
+          <p:cNvPr id="16" name="Rounded Rectangle 15"/>
           <p:cNvSpPr/>
           <p:nvPr/>
         </p:nvSpPr>
         <p:spPr>
           <a:xfrm>
-            <a:off x="640080" y="3703320"/>
-            <a:ext cx="5349240" cy="2057400"/>
+            <a:off x="6278727" y="2331720"/>
+            <a:ext cx="2453563" cy="3474720"/>
           </a:xfrm>
           <a:prstGeom prst="roundRect">
             <a:avLst/>
@@ -4003,9 +3965,9 @@
           <a:solidFill>
             <a:srgbClr val="FFFFFF"/>
           </a:solidFill>
-          <a:ln w="22860">
+          <a:ln w="20320">
             <a:solidFill>
-              <a:srgbClr val="B23A2A"/>
+              <a:srgbClr val="C8A86B"/>
             </a:solidFill>
           </a:ln>
           <a:effectLst/>
@@ -4034,20 +3996,20 @@
       </p:sp>
       <p:sp>
         <p:nvSpPr>
-          <p:cNvPr id="16" name="Oval 15"/>
+          <p:cNvPr id="17" name="Oval 16"/>
           <p:cNvSpPr/>
           <p:nvPr/>
         </p:nvSpPr>
         <p:spPr>
           <a:xfrm>
-            <a:off x="804672" y="3867912"/>
-            <a:ext cx="457200" cy="457200"/>
+            <a:off x="7094029" y="2651760"/>
+            <a:ext cx="822960" cy="822960"/>
           </a:xfrm>
           <a:prstGeom prst="ellipse">
             <a:avLst/>
           </a:prstGeom>
           <a:solidFill>
-            <a:srgbClr val="B23A2A"/>
+            <a:srgbClr val="C8A86B"/>
           </a:solidFill>
           <a:ln>
             <a:noFill/>
@@ -4078,14 +4040,14 @@
       </p:sp>
       <p:sp>
         <p:nvSpPr>
-          <p:cNvPr id="17" name="TextBox 16"/>
+          <p:cNvPr id="18" name="TextBox 17"/>
           <p:cNvSpPr txBox="1"/>
           <p:nvPr/>
         </p:nvSpPr>
         <p:spPr>
           <a:xfrm>
-            <a:off x="804672" y="3922776"/>
-            <a:ext cx="457200" cy="384048"/>
+            <a:off x="7094029" y="2834640"/>
+            <a:ext cx="822960" cy="457200"/>
           </a:xfrm>
           <a:prstGeom prst="rect">
             <a:avLst/>
@@ -4100,29 +4062,66 @@
           <a:p>
             <a:pPr algn="ctr"/>
             <a:r>
-              <a:rPr sz="1600" b="1">
+              <a:rPr sz="2400" b="1">
                 <a:solidFill>
                   <a:srgbClr val="FFFFFF"/>
+                </a:solidFill>
+                <a:latin typeface="楷体"/>
+                <a:ea typeface="楷体"/>
+                <a:cs typeface="楷体"/>
+              </a:rPr>
+              <a:t>3</a:t>
+            </a:r>
+          </a:p>
+        </p:txBody>
+      </p:sp>
+      <p:sp>
+        <p:nvSpPr>
+          <p:cNvPr id="19" name="TextBox 18"/>
+          <p:cNvSpPr txBox="1"/>
+          <p:nvPr/>
+        </p:nvSpPr>
+        <p:spPr>
+          <a:xfrm>
+            <a:off x="6461607" y="3703320"/>
+            <a:ext cx="2087803" cy="548640"/>
+          </a:xfrm>
+          <a:prstGeom prst="rect">
+            <a:avLst/>
+          </a:prstGeom>
+          <a:noFill/>
+        </p:spPr>
+        <p:txBody>
+          <a:bodyPr wrap="square" anchor="t" lIns="0" rIns="0" tIns="0" bIns="0">
+            <a:spAutoFit/>
+          </a:bodyPr>
+          <a:lstStyle/>
+          <a:p>
+            <a:pPr algn="ctr"/>
+            <a:r>
+              <a:rPr sz="1700" b="1">
+                <a:solidFill>
+                  <a:srgbClr val="C8A86B"/>
                 </a:solidFill>
                 <a:latin typeface="微软雅黑"/>
                 <a:ea typeface="微软雅黑"/>
                 <a:cs typeface="微软雅黑"/>
               </a:rPr>
-              <a:t>3</a:t>
-            </a:r>
-          </a:p>
-        </p:txBody>
-      </p:sp>
-      <p:sp>
-        <p:nvSpPr>
-          <p:cNvPr id="18" name="TextBox 17"/>
+              <a:t>思维品质</a:t>
+            </a:r>
+          </a:p>
+        </p:txBody>
+      </p:sp>
+      <p:sp>
+        <p:nvSpPr>
+          <p:cNvPr id="20" name="TextBox 19"/>
           <p:cNvSpPr txBox="1"/>
           <p:nvPr/>
         </p:nvSpPr>
         <p:spPr>
           <a:xfrm>
-            <a:off x="1371600" y="3813048"/>
-            <a:ext cx="4434840" cy="457200"/>
+            <a:off x="6479895" y="4297680"/>
+            <a:ext cx="2051227" cy="1371600"/>
           </a:xfrm>
           <a:prstGeom prst="rect">
             <a:avLst/>
@@ -4135,54 +4134,13 @@
           </a:bodyPr>
           <a:lstStyle/>
           <a:p>
-            <a:pPr algn="l">
+            <a:pPr algn="ctr">
               <a:lnSpc>
-                <a:spcPct val="110000"/>
+                <a:spcPct val="145000"/>
               </a:lnSpc>
             </a:pPr>
             <a:r>
-              <a:rPr sz="1600" b="1">
-                <a:solidFill>
-                  <a:srgbClr val="1C2A33"/>
-                </a:solidFill>
-                <a:latin typeface="微软雅黑"/>
-                <a:ea typeface="微软雅黑"/>
-                <a:cs typeface="微软雅黑"/>
-              </a:rPr>
-              <a:t>目标</a:t>
-            </a:r>
-          </a:p>
-        </p:txBody>
-      </p:sp>
-      <p:sp>
-        <p:nvSpPr>
-          <p:cNvPr id="19" name="TextBox 18"/>
-          <p:cNvSpPr txBox="1"/>
-          <p:nvPr/>
-        </p:nvSpPr>
-        <p:spPr>
-          <a:xfrm>
-            <a:off x="1371600" y="4251960"/>
-            <a:ext cx="4434840" cy="1417320"/>
-          </a:xfrm>
-          <a:prstGeom prst="rect">
-            <a:avLst/>
-          </a:prstGeom>
-          <a:noFill/>
-        </p:spPr>
-        <p:txBody>
-          <a:bodyPr wrap="square" anchor="t" lIns="0" rIns="0" tIns="0" bIns="0">
-            <a:spAutoFit/>
-          </a:bodyPr>
-          <a:lstStyle/>
-          <a:p>
-            <a:pPr algn="l">
-              <a:lnSpc>
-                <a:spcPct val="128000"/>
-              </a:lnSpc>
-            </a:pPr>
-            <a:r>
-              <a:rPr sz="1400" b="0">
+              <a:rPr sz="1300" b="0">
                 <a:solidFill>
                   <a:srgbClr val="1C2A33"/>
                 </a:solidFill>
@@ -4190,21 +4148,21 @@
                 <a:ea typeface="楷体"/>
                 <a:cs typeface="楷体"/>
               </a:rPr>
-              <a:t>思维品质：通过分析细节动作写人，培养「于细微处见性格」的文本细读思维。</a:t>
-            </a:r>
-          </a:p>
-        </p:txBody>
-      </p:sp>
-      <p:sp>
-        <p:nvSpPr>
-          <p:cNvPr id="20" name="Rounded Rectangle 19"/>
+              <a:t>通过分析细节动作写人，培养「于细微处见性格」的文本细读思维</a:t>
+            </a:r>
+          </a:p>
+        </p:txBody>
+      </p:sp>
+      <p:sp>
+        <p:nvSpPr>
+          <p:cNvPr id="21" name="Rounded Rectangle 20"/>
           <p:cNvSpPr/>
           <p:nvPr/>
         </p:nvSpPr>
         <p:spPr>
           <a:xfrm>
-            <a:off x="6263640" y="3703320"/>
-            <a:ext cx="5349240" cy="2057400"/>
+            <a:off x="9098051" y="2331720"/>
+            <a:ext cx="2453563" cy="3474720"/>
           </a:xfrm>
           <a:prstGeom prst="roundRect">
             <a:avLst/>
@@ -4212,9 +4170,9 @@
           <a:solidFill>
             <a:srgbClr val="FFFFFF"/>
           </a:solidFill>
-          <a:ln w="22860">
+          <a:ln w="20320">
             <a:solidFill>
-              <a:srgbClr val="B23A2A"/>
+              <a:srgbClr val="6B6258"/>
             </a:solidFill>
           </a:ln>
           <a:effectLst/>
@@ -4243,20 +4201,20 @@
       </p:sp>
       <p:sp>
         <p:nvSpPr>
-          <p:cNvPr id="21" name="Oval 20"/>
+          <p:cNvPr id="22" name="Oval 21"/>
           <p:cNvSpPr/>
           <p:nvPr/>
         </p:nvSpPr>
         <p:spPr>
           <a:xfrm>
-            <a:off x="6428232" y="3867912"/>
-            <a:ext cx="457200" cy="457200"/>
+            <a:off x="9913353" y="2651760"/>
+            <a:ext cx="822960" cy="822960"/>
           </a:xfrm>
           <a:prstGeom prst="ellipse">
             <a:avLst/>
           </a:prstGeom>
           <a:solidFill>
-            <a:srgbClr val="B23A2A"/>
+            <a:srgbClr val="6B6258"/>
           </a:solidFill>
           <a:ln>
             <a:noFill/>
@@ -4287,14 +4245,14 @@
       </p:sp>
       <p:sp>
         <p:nvSpPr>
-          <p:cNvPr id="22" name="TextBox 21"/>
+          <p:cNvPr id="23" name="TextBox 22"/>
           <p:cNvSpPr txBox="1"/>
           <p:nvPr/>
         </p:nvSpPr>
         <p:spPr>
           <a:xfrm>
-            <a:off x="6428232" y="3922776"/>
-            <a:ext cx="457200" cy="384048"/>
+            <a:off x="9913353" y="2834640"/>
+            <a:ext cx="822960" cy="457200"/>
           </a:xfrm>
           <a:prstGeom prst="rect">
             <a:avLst/>
@@ -4309,29 +4267,66 @@
           <a:p>
             <a:pPr algn="ctr"/>
             <a:r>
-              <a:rPr sz="1600" b="1">
+              <a:rPr sz="2400" b="1">
                 <a:solidFill>
                   <a:srgbClr val="FFFFFF"/>
+                </a:solidFill>
+                <a:latin typeface="楷体"/>
+                <a:ea typeface="楷体"/>
+                <a:cs typeface="楷体"/>
+              </a:rPr>
+              <a:t>4</a:t>
+            </a:r>
+          </a:p>
+        </p:txBody>
+      </p:sp>
+      <p:sp>
+        <p:nvSpPr>
+          <p:cNvPr id="24" name="TextBox 23"/>
+          <p:cNvSpPr txBox="1"/>
+          <p:nvPr/>
+        </p:nvSpPr>
+        <p:spPr>
+          <a:xfrm>
+            <a:off x="9280931" y="3703320"/>
+            <a:ext cx="2087803" cy="548640"/>
+          </a:xfrm>
+          <a:prstGeom prst="rect">
+            <a:avLst/>
+          </a:prstGeom>
+          <a:noFill/>
+        </p:spPr>
+        <p:txBody>
+          <a:bodyPr wrap="square" anchor="t" lIns="0" rIns="0" tIns="0" bIns="0">
+            <a:spAutoFit/>
+          </a:bodyPr>
+          <a:lstStyle/>
+          <a:p>
+            <a:pPr algn="ctr"/>
+            <a:r>
+              <a:rPr sz="1700" b="1">
+                <a:solidFill>
+                  <a:srgbClr val="6B6258"/>
                 </a:solidFill>
                 <a:latin typeface="微软雅黑"/>
                 <a:ea typeface="微软雅黑"/>
                 <a:cs typeface="微软雅黑"/>
               </a:rPr>
-              <a:t>4</a:t>
-            </a:r>
-          </a:p>
-        </p:txBody>
-      </p:sp>
-      <p:sp>
-        <p:nvSpPr>
-          <p:cNvPr id="23" name="TextBox 22"/>
+              <a:t>学习能力</a:t>
+            </a:r>
+          </a:p>
+        </p:txBody>
+      </p:sp>
+      <p:sp>
+        <p:nvSpPr>
+          <p:cNvPr id="25" name="TextBox 24"/>
           <p:cNvSpPr txBox="1"/>
           <p:nvPr/>
         </p:nvSpPr>
         <p:spPr>
           <a:xfrm>
-            <a:off x="6995160" y="3813048"/>
-            <a:ext cx="4434840" cy="457200"/>
+            <a:off x="9299219" y="4297680"/>
+            <a:ext cx="2051227" cy="1371600"/>
           </a:xfrm>
           <a:prstGeom prst="rect">
             <a:avLst/>
@@ -4344,54 +4339,13 @@
           </a:bodyPr>
           <a:lstStyle/>
           <a:p>
-            <a:pPr algn="l">
+            <a:pPr algn="ctr">
               <a:lnSpc>
-                <a:spcPct val="110000"/>
+                <a:spcPct val="145000"/>
               </a:lnSpc>
             </a:pPr>
             <a:r>
-              <a:rPr sz="1600" b="1">
-                <a:solidFill>
-                  <a:srgbClr val="1C2A33"/>
-                </a:solidFill>
-                <a:latin typeface="微软雅黑"/>
-                <a:ea typeface="微软雅黑"/>
-                <a:cs typeface="微软雅黑"/>
-              </a:rPr>
-              <a:t>目标</a:t>
-            </a:r>
-          </a:p>
-        </p:txBody>
-      </p:sp>
-      <p:sp>
-        <p:nvSpPr>
-          <p:cNvPr id="24" name="TextBox 23"/>
-          <p:cNvSpPr txBox="1"/>
-          <p:nvPr/>
-        </p:nvSpPr>
-        <p:spPr>
-          <a:xfrm>
-            <a:off x="6995160" y="4251960"/>
-            <a:ext cx="4434840" cy="1417320"/>
-          </a:xfrm>
-          <a:prstGeom prst="rect">
-            <a:avLst/>
-          </a:prstGeom>
-          <a:noFill/>
-        </p:spPr>
-        <p:txBody>
-          <a:bodyPr wrap="square" anchor="t" lIns="0" rIns="0" tIns="0" bIns="0">
-            <a:spAutoFit/>
-          </a:bodyPr>
-          <a:lstStyle/>
-          <a:p>
-            <a:pPr algn="l">
-              <a:lnSpc>
-                <a:spcPct val="128000"/>
-              </a:lnSpc>
-            </a:pPr>
-            <a:r>
-              <a:rPr sz="1400" b="0">
+              <a:rPr sz="1300" b="0">
                 <a:solidFill>
                   <a:srgbClr val="1C2A33"/>
                 </a:solidFill>
@@ -4399,14 +4353,14 @@
                 <a:ea typeface="楷体"/>
                 <a:cs typeface="楷体"/>
               </a:rPr>
-              <a:t>学习能力：掌握「理情节→析细节→品人物」的史传读法。</a:t>
-            </a:r>
-          </a:p>
-        </p:txBody>
-      </p:sp>
-      <p:sp>
-        <p:nvSpPr>
-          <p:cNvPr id="25" name="TextBox 24"/>
+              <a:t>掌握「理情节→析细节→品人物」的史传读法</a:t>
+            </a:r>
+          </a:p>
+        </p:txBody>
+      </p:sp>
+      <p:sp>
+        <p:nvSpPr>
+          <p:cNvPr id="26" name="TextBox 25"/>
           <p:cNvSpPr txBox="1"/>
           <p:nvPr/>
         </p:nvSpPr>
@@ -4533,13 +4487,13 @@
             <a:r>
               <a:rPr sz="1300" b="1">
                 <a:solidFill>
-                  <a:srgbClr val="2E7D6B"/>
+                  <a:srgbClr val="B23A2A"/>
                 </a:solidFill>
                 <a:latin typeface="微软雅黑"/>
                 <a:ea typeface="微软雅黑"/>
                 <a:cs typeface="微软雅黑"/>
               </a:rPr>
-              <a:t>课文背景</a:t>
+              <a:t>背景 · 权威调研</a:t>
             </a:r>
           </a:p>
         </p:txBody>
@@ -4559,7 +4513,7 @@
             <a:avLst/>
           </a:prstGeom>
           <a:solidFill>
-            <a:srgbClr val="2E7D6B"/>
+            <a:srgbClr val="B23A2A"/>
           </a:solidFill>
           <a:ln>
             <a:noFill/>
@@ -4596,8 +4550,49 @@
         </p:nvSpPr>
         <p:spPr>
           <a:xfrm>
-            <a:off x="640080" y="1508760"/>
-            <a:ext cx="6766560" cy="4572000"/>
+            <a:off x="640080" y="1737360"/>
+            <a:ext cx="5227167" cy="548640"/>
+          </a:xfrm>
+          <a:prstGeom prst="rect">
+            <a:avLst/>
+          </a:prstGeom>
+          <a:noFill/>
+        </p:spPr>
+        <p:txBody>
+          <a:bodyPr wrap="square" anchor="t" lIns="0" rIns="0" tIns="0" bIns="0">
+            <a:spAutoFit/>
+          </a:bodyPr>
+          <a:lstStyle/>
+          <a:p>
+            <a:pPr algn="l">
+              <a:spcAft>
+                <a:spcPts val="600"/>
+              </a:spcAft>
+            </a:pPr>
+            <a:r>
+              <a:rPr sz="2000" b="1">
+                <a:solidFill>
+                  <a:srgbClr val="B23A2A"/>
+                </a:solidFill>
+                <a:latin typeface="楷体"/>
+                <a:ea typeface="楷体"/>
+                <a:cs typeface="楷体"/>
+              </a:rPr>
+              <a:t>课文定位</a:t>
+            </a:r>
+          </a:p>
+        </p:txBody>
+      </p:sp>
+      <p:sp>
+        <p:nvSpPr>
+          <p:cNvPr id="6" name="TextBox 5"/>
+          <p:cNvSpPr txBox="1"/>
+          <p:nvPr/>
+        </p:nvSpPr>
+        <p:spPr>
+          <a:xfrm>
+            <a:off x="640080" y="2331720"/>
+            <a:ext cx="5227167" cy="4206240"/>
           </a:xfrm>
           <a:prstGeom prst="rect">
             <a:avLst/>
@@ -4615,11 +4610,11 @@
                 <a:spcPct val="150000"/>
               </a:lnSpc>
               <a:spcAft>
-                <a:spcPts val="600"/>
+                <a:spcPts val="800"/>
               </a:spcAft>
             </a:pPr>
             <a:r>
-              <a:rPr sz="1600" b="0">
+              <a:rPr sz="1450" b="0">
                 <a:solidFill>
                   <a:srgbClr val="1C2A33"/>
                 </a:solidFill>
@@ -4627,46 +4622,80 @@
                 <a:ea typeface="楷体"/>
                 <a:cs typeface="楷体"/>
               </a:rPr>
-              <a:t>《鸿门宴》出自《史记·项羽本纪》。写楚汉相争关键一夜：刘邦谢罪、范增举玦、项庄舞剑、樊哙闯帐、刘邦遁走。司马迁以对话、动作、细节写活人物——项羽刚愎磊落、刘邦机变、范增焦灼、张良沉稳、樊哙忠勇。是史传写人范本。</a:t>
-            </a:r>
-          </a:p>
-        </p:txBody>
-      </p:sp>
-      <p:pic>
-        <p:nvPicPr>
-          <p:cNvPr id="6" name="Picture 5" descr="typewriter.jpg"/>
-          <p:cNvPicPr>
-            <a:picLocks noChangeAspect="1"/>
-          </p:cNvPicPr>
-          <p:nvPr/>
-        </p:nvPicPr>
-        <p:blipFill>
-          <a:blip r:embed="rId2"/>
-          <a:srcRect l="5860" r="5860"/>
-          <a:stretch>
-            <a:fillRect/>
-          </a:stretch>
-        </p:blipFill>
-        <p:spPr>
-          <a:xfrm>
-            <a:off x="8046720" y="1508760"/>
-            <a:ext cx="4114800" cy="3108960"/>
-          </a:xfrm>
-          <a:prstGeom prst="rect">
-            <a:avLst/>
-          </a:prstGeom>
-        </p:spPr>
-      </p:pic>
-      <p:sp>
-        <p:nvSpPr>
-          <p:cNvPr id="7" name="TextBox 6"/>
+              <a:t>《鸿门宴》出自《史记·项羽本纪》。写楚汉相争关键一夜：刘邦谢罪、范增举玦、项庄舞剑、樊哙闯帐、刘邦遁走。司马迁以对话、动作、细节写活人物——项羽刚愎磊落、刘邦机变、范增焦灼、张良沉稳、樊哙忠勇。</a:t>
+            </a:r>
+          </a:p>
+          <a:p>
+            <a:pPr algn="l">
+              <a:lnSpc>
+                <a:spcPct val="150000"/>
+              </a:lnSpc>
+            </a:pPr>
+            <a:r>
+              <a:rPr sz="1350" b="0">
+                <a:solidFill>
+                  <a:srgbClr val="6B6258"/>
+                </a:solidFill>
+                <a:latin typeface="楷体"/>
+                <a:ea typeface="楷体"/>
+                <a:cs typeface="楷体"/>
+              </a:rPr>
+              <a:t>本单元《中华传统文化经典》：整本书阅读与研讨 / 中华传统文化经典。</a:t>
+            </a:r>
+          </a:p>
+        </p:txBody>
+      </p:sp>
+      <p:sp>
+        <p:nvSpPr>
+          <p:cNvPr id="7" name="Rounded Rectangle 6"/>
+          <p:cNvSpPr/>
+          <p:nvPr/>
+        </p:nvSpPr>
+        <p:spPr>
+          <a:xfrm>
+            <a:off x="6324447" y="1737360"/>
+            <a:ext cx="5227167" cy="4480560"/>
+          </a:xfrm>
+          <a:prstGeom prst="roundRect">
+            <a:avLst/>
+          </a:prstGeom>
+          <a:solidFill>
+            <a:srgbClr val="1C2A33"/>
+          </a:solidFill>
+          <a:effectLst/>
+        </p:spPr>
+        <p:style>
+          <a:lnRef idx="1">
+            <a:schemeClr val="accent1"/>
+          </a:lnRef>
+          <a:fillRef idx="3">
+            <a:schemeClr val="accent1"/>
+          </a:fillRef>
+          <a:effectRef idx="2">
+            <a:schemeClr val="accent1"/>
+          </a:effectRef>
+          <a:fontRef idx="minor">
+            <a:schemeClr val="lt1"/>
+          </a:fontRef>
+        </p:style>
+        <p:txBody>
+          <a:bodyPr rtlCol="0" anchor="ctr"/>
+          <a:lstStyle/>
+          <a:p>
+            <a:pPr algn="ctr"/>
+          </a:p>
+        </p:txBody>
+      </p:sp>
+      <p:sp>
+        <p:nvSpPr>
+          <p:cNvPr id="8" name="TextBox 7"/>
           <p:cNvSpPr txBox="1"/>
           <p:nvPr/>
         </p:nvSpPr>
         <p:spPr>
           <a:xfrm>
-            <a:off x="8046720" y="4663440"/>
-            <a:ext cx="4114800" cy="365760"/>
+            <a:off x="6598767" y="1920240"/>
+            <a:ext cx="4678527" cy="457200"/>
           </a:xfrm>
           <a:prstGeom prst="rect">
             <a:avLst/>
@@ -4679,24 +4708,110 @@
           </a:bodyPr>
           <a:lstStyle/>
           <a:p>
-            <a:pPr algn="ctr"/>
-            <a:r>
-              <a:rPr sz="1100" b="0">
-                <a:solidFill>
-                  <a:srgbClr val="6B6258"/>
+            <a:pPr algn="l"/>
+            <a:r>
+              <a:rPr sz="1700" b="1">
+                <a:solidFill>
+                  <a:srgbClr val="C8A86B"/>
+                </a:solidFill>
+                <a:latin typeface="楷体"/>
+                <a:ea typeface="楷体"/>
+                <a:cs typeface="楷体"/>
+              </a:rPr>
+              <a:t>权威来源</a:t>
+            </a:r>
+          </a:p>
+        </p:txBody>
+      </p:sp>
+      <p:sp>
+        <p:nvSpPr>
+          <p:cNvPr id="9" name="TextBox 8"/>
+          <p:cNvSpPr txBox="1"/>
+          <p:nvPr/>
+        </p:nvSpPr>
+        <p:spPr>
+          <a:xfrm>
+            <a:off x="6598767" y="2468880"/>
+            <a:ext cx="4678527" cy="3657600"/>
+          </a:xfrm>
+          <a:prstGeom prst="rect">
+            <a:avLst/>
+          </a:prstGeom>
+          <a:noFill/>
+        </p:spPr>
+        <p:txBody>
+          <a:bodyPr wrap="square" anchor="t" lIns="0" rIns="0" tIns="0" bIns="0">
+            <a:spAutoFit/>
+          </a:bodyPr>
+          <a:lstStyle/>
+          <a:p>
+            <a:pPr algn="l">
+              <a:lnSpc>
+                <a:spcPct val="145000"/>
+              </a:lnSpc>
+              <a:spcAft>
+                <a:spcPts val="800"/>
+              </a:spcAft>
+            </a:pPr>
+            <a:r>
+              <a:rPr sz="1250" b="0">
+                <a:solidFill>
+                  <a:srgbClr val="FFFFFF"/>
+                </a:solidFill>
+                <a:latin typeface="楷体"/>
+                <a:ea typeface="楷体"/>
+                <a:cs typeface="楷体"/>
+              </a:rPr>
+              <a:t>1. 丁新闻：于微言处观风云——《鸿门宴》文本细读</a:t>
+            </a:r>
+          </a:p>
+          <a:p>
+            <a:pPr algn="l">
+              <a:lnSpc>
+                <a:spcPct val="145000"/>
+              </a:lnSpc>
+              <a:spcAft>
+                <a:spcPts val="800"/>
+              </a:spcAft>
+            </a:pPr>
+            <a:r>
+              <a:rPr sz="1250" b="0">
+                <a:solidFill>
+                  <a:srgbClr val="FFFFFF"/>
+                </a:solidFill>
+                <a:latin typeface="楷体"/>
+                <a:ea typeface="楷体"/>
+                <a:cs typeface="楷体"/>
+              </a:rPr>
+              <a:t>2. 亦诗网：鸿门宴——楚汉之争的开端（司马迁的悲剧英雄写人）</a:t>
+            </a:r>
+          </a:p>
+          <a:p>
+            <a:pPr algn="l">
+              <a:lnSpc>
+                <a:spcPct val="140000"/>
+              </a:lnSpc>
+              <a:spcAft>
+                <a:spcPts val="400"/>
+              </a:spcAft>
+            </a:pPr>
+            <a:r>
+              <a:rPr sz="1150" b="0">
+                <a:solidFill>
+                  <a:srgbClr val="E7DFD2"/>
                 </a:solidFill>
                 <a:latin typeface="微软雅黑"/>
                 <a:ea typeface="微软雅黑"/>
                 <a:cs typeface="微软雅黑"/>
               </a:rPr>
-              <a:t>资料图（自由授权，复用 typewriter.jpg）</a:t>
-            </a:r>
-          </a:p>
-        </p:txBody>
-      </p:sp>
-      <p:sp>
-        <p:nvSpPr>
-          <p:cNvPr id="8" name="TextBox 7"/>
+              <a:t>本课件未使用无关配图，以学科色块呈现。</a:t>
+            </a:r>
+          </a:p>
+        </p:txBody>
+      </p:sp>
+      <p:sp>
+        <p:nvSpPr>
+          <p:cNvPr id="10" name="TextBox 9"/>
           <p:cNvSpPr txBox="1"/>
           <p:nvPr/>
         </p:nvSpPr>
@@ -4829,7 +4944,7 @@
                 <a:ea typeface="微软雅黑"/>
                 <a:cs typeface="微软雅黑"/>
               </a:rPr>
-              <a:t>学习重点</a:t>
+              <a:t>重点</a:t>
             </a:r>
           </a:p>
         </p:txBody>
@@ -4880,14 +4995,51 @@
       </p:sp>
       <p:sp>
         <p:nvSpPr>
-          <p:cNvPr id="5" name="Rounded Rectangle 4"/>
+          <p:cNvPr id="5" name="TextBox 4"/>
+          <p:cNvSpPr txBox="1"/>
+          <p:nvPr/>
+        </p:nvSpPr>
+        <p:spPr>
+          <a:xfrm>
+            <a:off x="640080" y="1325880"/>
+            <a:ext cx="10515600" cy="548640"/>
+          </a:xfrm>
+          <a:prstGeom prst="rect">
+            <a:avLst/>
+          </a:prstGeom>
+          <a:noFill/>
+        </p:spPr>
+        <p:txBody>
+          <a:bodyPr wrap="square" anchor="t" lIns="0" rIns="0" tIns="0" bIns="0">
+            <a:spAutoFit/>
+          </a:bodyPr>
+          <a:lstStyle/>
+          <a:p>
+            <a:pPr algn="l"/>
+            <a:r>
+              <a:rPr sz="2800" b="1">
+                <a:solidFill>
+                  <a:srgbClr val="1C2A33"/>
+                </a:solidFill>
+                <a:latin typeface="楷体"/>
+                <a:ea typeface="楷体"/>
+                <a:cs typeface="楷体"/>
+              </a:rPr>
+              <a:t>本课重点</a:t>
+            </a:r>
+          </a:p>
+        </p:txBody>
+      </p:sp>
+      <p:sp>
+        <p:nvSpPr>
+          <p:cNvPr id="6" name="Rounded Rectangle 5"/>
           <p:cNvSpPr/>
           <p:nvPr/>
         </p:nvSpPr>
         <p:spPr>
           <a:xfrm>
-            <a:off x="640080" y="1371600"/>
-            <a:ext cx="10911535" cy="1597152"/>
+            <a:off x="640080" y="2194560"/>
+            <a:ext cx="3393338" cy="3931920"/>
           </a:xfrm>
           <a:prstGeom prst="roundRect">
             <a:avLst/>
@@ -4895,9 +5047,9 @@
           <a:solidFill>
             <a:srgbClr val="FFFFFF"/>
           </a:solidFill>
-          <a:ln w="22860">
+          <a:ln w="20320">
             <a:solidFill>
-              <a:srgbClr val="C8A86B"/>
+              <a:srgbClr val="B23A2A"/>
             </a:solidFill>
           </a:ln>
           <a:effectLst/>
@@ -4926,107 +5078,23 @@
       </p:sp>
       <p:sp>
         <p:nvSpPr>
-          <p:cNvPr id="6" name="TextBox 5"/>
-          <p:cNvSpPr txBox="1"/>
-          <p:nvPr/>
-        </p:nvSpPr>
-        <p:spPr>
-          <a:xfrm>
-            <a:off x="1371600" y="1481328"/>
-            <a:ext cx="9997135" cy="457200"/>
-          </a:xfrm>
-          <a:prstGeom prst="rect">
-            <a:avLst/>
-          </a:prstGeom>
-          <a:noFill/>
-        </p:spPr>
-        <p:txBody>
-          <a:bodyPr wrap="square" anchor="t" lIns="0" rIns="0" tIns="0" bIns="0">
-            <a:spAutoFit/>
-          </a:bodyPr>
-          <a:lstStyle/>
-          <a:p>
-            <a:pPr algn="l">
-              <a:lnSpc>
-                <a:spcPct val="110000"/>
-              </a:lnSpc>
-            </a:pPr>
-            <a:r>
-              <a:rPr sz="1600" b="1">
-                <a:solidFill>
-                  <a:srgbClr val="1C2A33"/>
-                </a:solidFill>
-                <a:latin typeface="微软雅黑"/>
-                <a:ea typeface="微软雅黑"/>
-                <a:cs typeface="微软雅黑"/>
-              </a:rPr>
-              <a:t/>
-            </a:r>
-          </a:p>
-        </p:txBody>
-      </p:sp>
-      <p:sp>
-        <p:nvSpPr>
-          <p:cNvPr id="7" name="TextBox 6"/>
-          <p:cNvSpPr txBox="1"/>
-          <p:nvPr/>
-        </p:nvSpPr>
-        <p:spPr>
-          <a:xfrm>
-            <a:off x="1371600" y="1920240"/>
-            <a:ext cx="9997135" cy="957072"/>
-          </a:xfrm>
-          <a:prstGeom prst="rect">
-            <a:avLst/>
-          </a:prstGeom>
-          <a:noFill/>
-        </p:spPr>
-        <p:txBody>
-          <a:bodyPr wrap="square" anchor="t" lIns="0" rIns="0" tIns="0" bIns="0">
-            <a:spAutoFit/>
-          </a:bodyPr>
-          <a:lstStyle/>
-          <a:p>
-            <a:pPr algn="l">
-              <a:lnSpc>
-                <a:spcPct val="128000"/>
-              </a:lnSpc>
-            </a:pPr>
-            <a:r>
-              <a:rPr sz="1300" b="0">
-                <a:solidFill>
-                  <a:srgbClr val="1C2A33"/>
-                </a:solidFill>
-                <a:latin typeface="楷体"/>
-                <a:ea typeface="楷体"/>
-                <a:cs typeface="楷体"/>
-              </a:rPr>
-              <a:t>① 情节链：谢罪→举玦→舞剑→闯帐→遁走。</a:t>
-            </a:r>
-          </a:p>
-        </p:txBody>
-      </p:sp>
-      <p:sp>
-        <p:nvSpPr>
-          <p:cNvPr id="8" name="Rounded Rectangle 7"/>
+          <p:cNvPr id="7" name="Oval 6"/>
           <p:cNvSpPr/>
           <p:nvPr/>
         </p:nvSpPr>
         <p:spPr>
           <a:xfrm>
-            <a:off x="640080" y="3078480"/>
-            <a:ext cx="10911535" cy="1597152"/>
-          </a:xfrm>
-          <a:prstGeom prst="roundRect">
+            <a:off x="868680" y="2423160"/>
+            <a:ext cx="548640" cy="548640"/>
+          </a:xfrm>
+          <a:prstGeom prst="ellipse">
             <a:avLst/>
           </a:prstGeom>
           <a:solidFill>
-            <a:srgbClr val="FFFFFF"/>
+            <a:srgbClr val="B23A2A"/>
           </a:solidFill>
-          <a:ln w="22860">
-            <a:solidFill>
-              <a:srgbClr val="C8A86B"/>
-            </a:solidFill>
+          <a:ln>
+            <a:noFill/>
           </a:ln>
           <a:effectLst/>
         </p:spPr>
@@ -5054,14 +5122,14 @@
       </p:sp>
       <p:sp>
         <p:nvSpPr>
-          <p:cNvPr id="9" name="TextBox 8"/>
+          <p:cNvPr id="8" name="TextBox 7"/>
           <p:cNvSpPr txBox="1"/>
           <p:nvPr/>
         </p:nvSpPr>
         <p:spPr>
           <a:xfrm>
-            <a:off x="1371600" y="3188208"/>
-            <a:ext cx="9997135" cy="457200"/>
+            <a:off x="868680" y="2487168"/>
+            <a:ext cx="548640" cy="411480"/>
           </a:xfrm>
           <a:prstGeom prst="rect">
             <a:avLst/>
@@ -5074,35 +5142,31 @@
           </a:bodyPr>
           <a:lstStyle/>
           <a:p>
-            <a:pPr algn="l">
-              <a:lnSpc>
-                <a:spcPct val="110000"/>
-              </a:lnSpc>
-            </a:pPr>
-            <a:r>
-              <a:rPr sz="1600" b="1">
-                <a:solidFill>
-                  <a:srgbClr val="1C2A33"/>
+            <a:pPr algn="ctr"/>
+            <a:r>
+              <a:rPr sz="2000" b="1">
+                <a:solidFill>
+                  <a:srgbClr val="FFFFFF"/>
                 </a:solidFill>
                 <a:latin typeface="微软雅黑"/>
                 <a:ea typeface="微软雅黑"/>
                 <a:cs typeface="微软雅黑"/>
               </a:rPr>
-              <a:t/>
-            </a:r>
-          </a:p>
-        </p:txBody>
-      </p:sp>
-      <p:sp>
-        <p:nvSpPr>
-          <p:cNvPr id="10" name="TextBox 9"/>
+              <a:t>1</a:t>
+            </a:r>
+          </a:p>
+        </p:txBody>
+      </p:sp>
+      <p:sp>
+        <p:nvSpPr>
+          <p:cNvPr id="9" name="TextBox 8"/>
           <p:cNvSpPr txBox="1"/>
           <p:nvPr/>
         </p:nvSpPr>
         <p:spPr>
           <a:xfrm>
-            <a:off x="1371600" y="3627120"/>
-            <a:ext cx="9997135" cy="957072"/>
+            <a:off x="1554480" y="2450592"/>
+            <a:ext cx="2296058" cy="731520"/>
           </a:xfrm>
           <a:prstGeom prst="rect">
             <a:avLst/>
@@ -5115,21 +5179,58 @@
           </a:bodyPr>
           <a:lstStyle/>
           <a:p>
-            <a:pPr algn="l">
-              <a:lnSpc>
-                <a:spcPct val="128000"/>
-              </a:lnSpc>
-            </a:pPr>
-            <a:r>
-              <a:rPr sz="1300" b="0">
-                <a:solidFill>
-                  <a:srgbClr val="1C2A33"/>
+            <a:pPr algn="l"/>
+            <a:r>
+              <a:rPr sz="1400" b="1">
+                <a:solidFill>
+                  <a:srgbClr val="6B6258"/>
                 </a:solidFill>
                 <a:latin typeface="楷体"/>
                 <a:ea typeface="楷体"/>
                 <a:cs typeface="楷体"/>
               </a:rPr>
-              <a:t>② 写人：细节动作（举玦/舞剑/闯帐）。</a:t>
+              <a:t>要点</a:t>
+            </a:r>
+          </a:p>
+        </p:txBody>
+      </p:sp>
+      <p:sp>
+        <p:nvSpPr>
+          <p:cNvPr id="10" name="TextBox 9"/>
+          <p:cNvSpPr txBox="1"/>
+          <p:nvPr/>
+        </p:nvSpPr>
+        <p:spPr>
+          <a:xfrm>
+            <a:off x="914400" y="3200400"/>
+            <a:ext cx="2844698" cy="2743200"/>
+          </a:xfrm>
+          <a:prstGeom prst="rect">
+            <a:avLst/>
+          </a:prstGeom>
+          <a:noFill/>
+        </p:spPr>
+        <p:txBody>
+          <a:bodyPr wrap="square" anchor="t" lIns="0" rIns="0" tIns="0" bIns="0">
+            <a:spAutoFit/>
+          </a:bodyPr>
+          <a:lstStyle/>
+          <a:p>
+            <a:pPr algn="l">
+              <a:lnSpc>
+                <a:spcPct val="150000"/>
+              </a:lnSpc>
+            </a:pPr>
+            <a:r>
+              <a:rPr sz="1450" b="0">
+                <a:solidFill>
+                  <a:srgbClr val="1C2A33"/>
+                </a:solidFill>
+                <a:latin typeface="楷体"/>
+                <a:ea typeface="楷体"/>
+                <a:cs typeface="楷体"/>
+              </a:rPr>
+              <a:t>① 情节链：谢罪→举玦→舞剑→闯帐→遁走。</a:t>
             </a:r>
           </a:p>
         </p:txBody>
@@ -5142,8 +5243,8 @@
         </p:nvSpPr>
         <p:spPr>
           <a:xfrm>
-            <a:off x="640080" y="4785360"/>
-            <a:ext cx="10911535" cy="1597152"/>
+            <a:off x="4399178" y="2194560"/>
+            <a:ext cx="3393338" cy="3931920"/>
           </a:xfrm>
           <a:prstGeom prst="roundRect">
             <a:avLst/>
@@ -5151,9 +5252,9 @@
           <a:solidFill>
             <a:srgbClr val="FFFFFF"/>
           </a:solidFill>
-          <a:ln w="22860">
+          <a:ln w="20320">
             <a:solidFill>
-              <a:srgbClr val="C8A86B"/>
+              <a:srgbClr val="B23A2A"/>
             </a:solidFill>
           </a:ln>
           <a:effectLst/>
@@ -5182,14 +5283,58 @@
       </p:sp>
       <p:sp>
         <p:nvSpPr>
-          <p:cNvPr id="12" name="TextBox 11"/>
+          <p:cNvPr id="12" name="Oval 11"/>
+          <p:cNvSpPr/>
+          <p:nvPr/>
+        </p:nvSpPr>
+        <p:spPr>
+          <a:xfrm>
+            <a:off x="4627778" y="2423160"/>
+            <a:ext cx="548640" cy="548640"/>
+          </a:xfrm>
+          <a:prstGeom prst="ellipse">
+            <a:avLst/>
+          </a:prstGeom>
+          <a:solidFill>
+            <a:srgbClr val="B23A2A"/>
+          </a:solidFill>
+          <a:ln>
+            <a:noFill/>
+          </a:ln>
+          <a:effectLst/>
+        </p:spPr>
+        <p:style>
+          <a:lnRef idx="1">
+            <a:schemeClr val="accent1"/>
+          </a:lnRef>
+          <a:fillRef idx="3">
+            <a:schemeClr val="accent1"/>
+          </a:fillRef>
+          <a:effectRef idx="2">
+            <a:schemeClr val="accent1"/>
+          </a:effectRef>
+          <a:fontRef idx="minor">
+            <a:schemeClr val="lt1"/>
+          </a:fontRef>
+        </p:style>
+        <p:txBody>
+          <a:bodyPr rtlCol="0" anchor="ctr"/>
+          <a:lstStyle/>
+          <a:p>
+            <a:pPr algn="ctr"/>
+          </a:p>
+        </p:txBody>
+      </p:sp>
+      <p:sp>
+        <p:nvSpPr>
+          <p:cNvPr id="13" name="TextBox 12"/>
           <p:cNvSpPr txBox="1"/>
           <p:nvPr/>
         </p:nvSpPr>
         <p:spPr>
           <a:xfrm>
-            <a:off x="1371600" y="4895088"/>
-            <a:ext cx="9997135" cy="457200"/>
+            <a:off x="4627778" y="2487168"/>
+            <a:ext cx="548640" cy="411480"/>
           </a:xfrm>
           <a:prstGeom prst="rect">
             <a:avLst/>
@@ -5202,35 +5347,31 @@
           </a:bodyPr>
           <a:lstStyle/>
           <a:p>
-            <a:pPr algn="l">
-              <a:lnSpc>
-                <a:spcPct val="110000"/>
-              </a:lnSpc>
-            </a:pPr>
-            <a:r>
-              <a:rPr sz="1600" b="1">
-                <a:solidFill>
-                  <a:srgbClr val="1C2A33"/>
+            <a:pPr algn="ctr"/>
+            <a:r>
+              <a:rPr sz="2000" b="1">
+                <a:solidFill>
+                  <a:srgbClr val="FFFFFF"/>
                 </a:solidFill>
                 <a:latin typeface="微软雅黑"/>
                 <a:ea typeface="微软雅黑"/>
                 <a:cs typeface="微软雅黑"/>
               </a:rPr>
-              <a:t/>
-            </a:r>
-          </a:p>
-        </p:txBody>
-      </p:sp>
-      <p:sp>
-        <p:nvSpPr>
-          <p:cNvPr id="13" name="TextBox 12"/>
+              <a:t>2</a:t>
+            </a:r>
+          </a:p>
+        </p:txBody>
+      </p:sp>
+      <p:sp>
+        <p:nvSpPr>
+          <p:cNvPr id="14" name="TextBox 13"/>
           <p:cNvSpPr txBox="1"/>
           <p:nvPr/>
         </p:nvSpPr>
         <p:spPr>
           <a:xfrm>
-            <a:off x="1371600" y="5334000"/>
-            <a:ext cx="9997135" cy="957072"/>
+            <a:off x="5313578" y="2450592"/>
+            <a:ext cx="2296058" cy="731520"/>
           </a:xfrm>
           <a:prstGeom prst="rect">
             <a:avLst/>
@@ -5243,20 +5384,262 @@
           </a:bodyPr>
           <a:lstStyle/>
           <a:p>
-            <a:pPr algn="l">
-              <a:lnSpc>
-                <a:spcPct val="128000"/>
-              </a:lnSpc>
-            </a:pPr>
-            <a:r>
-              <a:rPr sz="1300" b="0">
-                <a:solidFill>
-                  <a:srgbClr val="1C2A33"/>
+            <a:pPr algn="l"/>
+            <a:r>
+              <a:rPr sz="1400" b="1">
+                <a:solidFill>
+                  <a:srgbClr val="6B6258"/>
                 </a:solidFill>
                 <a:latin typeface="楷体"/>
                 <a:ea typeface="楷体"/>
                 <a:cs typeface="楷体"/>
               </a:rPr>
+              <a:t>要点</a:t>
+            </a:r>
+          </a:p>
+        </p:txBody>
+      </p:sp>
+      <p:sp>
+        <p:nvSpPr>
+          <p:cNvPr id="15" name="TextBox 14"/>
+          <p:cNvSpPr txBox="1"/>
+          <p:nvPr/>
+        </p:nvSpPr>
+        <p:spPr>
+          <a:xfrm>
+            <a:off x="4673498" y="3200400"/>
+            <a:ext cx="2844698" cy="2743200"/>
+          </a:xfrm>
+          <a:prstGeom prst="rect">
+            <a:avLst/>
+          </a:prstGeom>
+          <a:noFill/>
+        </p:spPr>
+        <p:txBody>
+          <a:bodyPr wrap="square" anchor="t" lIns="0" rIns="0" tIns="0" bIns="0">
+            <a:spAutoFit/>
+          </a:bodyPr>
+          <a:lstStyle/>
+          <a:p>
+            <a:pPr algn="l">
+              <a:lnSpc>
+                <a:spcPct val="150000"/>
+              </a:lnSpc>
+            </a:pPr>
+            <a:r>
+              <a:rPr sz="1450" b="0">
+                <a:solidFill>
+                  <a:srgbClr val="1C2A33"/>
+                </a:solidFill>
+                <a:latin typeface="楷体"/>
+                <a:ea typeface="楷体"/>
+                <a:cs typeface="楷体"/>
+              </a:rPr>
+              <a:t>② 写人：细节动作（举玦/舞剑/闯帐）。</a:t>
+            </a:r>
+          </a:p>
+        </p:txBody>
+      </p:sp>
+      <p:sp>
+        <p:nvSpPr>
+          <p:cNvPr id="16" name="Rounded Rectangle 15"/>
+          <p:cNvSpPr/>
+          <p:nvPr/>
+        </p:nvSpPr>
+        <p:spPr>
+          <a:xfrm>
+            <a:off x="8158276" y="2194560"/>
+            <a:ext cx="3393338" cy="3931920"/>
+          </a:xfrm>
+          <a:prstGeom prst="roundRect">
+            <a:avLst/>
+          </a:prstGeom>
+          <a:solidFill>
+            <a:srgbClr val="FFFFFF"/>
+          </a:solidFill>
+          <a:ln w="20320">
+            <a:solidFill>
+              <a:srgbClr val="B23A2A"/>
+            </a:solidFill>
+          </a:ln>
+          <a:effectLst/>
+        </p:spPr>
+        <p:style>
+          <a:lnRef idx="1">
+            <a:schemeClr val="accent1"/>
+          </a:lnRef>
+          <a:fillRef idx="3">
+            <a:schemeClr val="accent1"/>
+          </a:fillRef>
+          <a:effectRef idx="2">
+            <a:schemeClr val="accent1"/>
+          </a:effectRef>
+          <a:fontRef idx="minor">
+            <a:schemeClr val="lt1"/>
+          </a:fontRef>
+        </p:style>
+        <p:txBody>
+          <a:bodyPr rtlCol="0" anchor="ctr"/>
+          <a:lstStyle/>
+          <a:p>
+            <a:pPr algn="ctr"/>
+          </a:p>
+        </p:txBody>
+      </p:sp>
+      <p:sp>
+        <p:nvSpPr>
+          <p:cNvPr id="17" name="Oval 16"/>
+          <p:cNvSpPr/>
+          <p:nvPr/>
+        </p:nvSpPr>
+        <p:spPr>
+          <a:xfrm>
+            <a:off x="8386876" y="2423160"/>
+            <a:ext cx="548640" cy="548640"/>
+          </a:xfrm>
+          <a:prstGeom prst="ellipse">
+            <a:avLst/>
+          </a:prstGeom>
+          <a:solidFill>
+            <a:srgbClr val="B23A2A"/>
+          </a:solidFill>
+          <a:ln>
+            <a:noFill/>
+          </a:ln>
+          <a:effectLst/>
+        </p:spPr>
+        <p:style>
+          <a:lnRef idx="1">
+            <a:schemeClr val="accent1"/>
+          </a:lnRef>
+          <a:fillRef idx="3">
+            <a:schemeClr val="accent1"/>
+          </a:fillRef>
+          <a:effectRef idx="2">
+            <a:schemeClr val="accent1"/>
+          </a:effectRef>
+          <a:fontRef idx="minor">
+            <a:schemeClr val="lt1"/>
+          </a:fontRef>
+        </p:style>
+        <p:txBody>
+          <a:bodyPr rtlCol="0" anchor="ctr"/>
+          <a:lstStyle/>
+          <a:p>
+            <a:pPr algn="ctr"/>
+          </a:p>
+        </p:txBody>
+      </p:sp>
+      <p:sp>
+        <p:nvSpPr>
+          <p:cNvPr id="18" name="TextBox 17"/>
+          <p:cNvSpPr txBox="1"/>
+          <p:nvPr/>
+        </p:nvSpPr>
+        <p:spPr>
+          <a:xfrm>
+            <a:off x="8386876" y="2487168"/>
+            <a:ext cx="548640" cy="411480"/>
+          </a:xfrm>
+          <a:prstGeom prst="rect">
+            <a:avLst/>
+          </a:prstGeom>
+          <a:noFill/>
+        </p:spPr>
+        <p:txBody>
+          <a:bodyPr wrap="square" anchor="t" lIns="0" rIns="0" tIns="0" bIns="0">
+            <a:spAutoFit/>
+          </a:bodyPr>
+          <a:lstStyle/>
+          <a:p>
+            <a:pPr algn="ctr"/>
+            <a:r>
+              <a:rPr sz="2000" b="1">
+                <a:solidFill>
+                  <a:srgbClr val="FFFFFF"/>
+                </a:solidFill>
+                <a:latin typeface="微软雅黑"/>
+                <a:ea typeface="微软雅黑"/>
+                <a:cs typeface="微软雅黑"/>
+              </a:rPr>
+              <a:t>3</a:t>
+            </a:r>
+          </a:p>
+        </p:txBody>
+      </p:sp>
+      <p:sp>
+        <p:nvSpPr>
+          <p:cNvPr id="19" name="TextBox 18"/>
+          <p:cNvSpPr txBox="1"/>
+          <p:nvPr/>
+        </p:nvSpPr>
+        <p:spPr>
+          <a:xfrm>
+            <a:off x="9072676" y="2450592"/>
+            <a:ext cx="2296058" cy="731520"/>
+          </a:xfrm>
+          <a:prstGeom prst="rect">
+            <a:avLst/>
+          </a:prstGeom>
+          <a:noFill/>
+        </p:spPr>
+        <p:txBody>
+          <a:bodyPr wrap="square" anchor="t" lIns="0" rIns="0" tIns="0" bIns="0">
+            <a:spAutoFit/>
+          </a:bodyPr>
+          <a:lstStyle/>
+          <a:p>
+            <a:pPr algn="l"/>
+            <a:r>
+              <a:rPr sz="1400" b="1">
+                <a:solidFill>
+                  <a:srgbClr val="6B6258"/>
+                </a:solidFill>
+                <a:latin typeface="楷体"/>
+                <a:ea typeface="楷体"/>
+                <a:cs typeface="楷体"/>
+              </a:rPr>
+              <a:t>要点</a:t>
+            </a:r>
+          </a:p>
+        </p:txBody>
+      </p:sp>
+      <p:sp>
+        <p:nvSpPr>
+          <p:cNvPr id="20" name="TextBox 19"/>
+          <p:cNvSpPr txBox="1"/>
+          <p:nvPr/>
+        </p:nvSpPr>
+        <p:spPr>
+          <a:xfrm>
+            <a:off x="8432596" y="3200400"/>
+            <a:ext cx="2844698" cy="2743200"/>
+          </a:xfrm>
+          <a:prstGeom prst="rect">
+            <a:avLst/>
+          </a:prstGeom>
+          <a:noFill/>
+        </p:spPr>
+        <p:txBody>
+          <a:bodyPr wrap="square" anchor="t" lIns="0" rIns="0" tIns="0" bIns="0">
+            <a:spAutoFit/>
+          </a:bodyPr>
+          <a:lstStyle/>
+          <a:p>
+            <a:pPr algn="l">
+              <a:lnSpc>
+                <a:spcPct val="150000"/>
+              </a:lnSpc>
+            </a:pPr>
+            <a:r>
+              <a:rPr sz="1450" b="0">
+                <a:solidFill>
+                  <a:srgbClr val="1C2A33"/>
+                </a:solidFill>
+                <a:latin typeface="楷体"/>
+                <a:ea typeface="楷体"/>
+                <a:cs typeface="楷体"/>
+              </a:rPr>
               <a:t>③ 人物：项羽(磊落刚愎)/刘邦(机变)/樊哙(忠勇)。</a:t>
             </a:r>
           </a:p>
@@ -5264,7 +5647,7 @@
       </p:sp>
       <p:sp>
         <p:nvSpPr>
-          <p:cNvPr id="14" name="TextBox 13"/>
+          <p:cNvPr id="21" name="TextBox 20"/>
           <p:cNvSpPr txBox="1"/>
           <p:nvPr/>
         </p:nvSpPr>
@@ -5391,13 +5774,13 @@
             <a:r>
               <a:rPr sz="1300" b="1">
                 <a:solidFill>
-                  <a:srgbClr val="2E7D6B"/>
+                  <a:srgbClr val="B23A2A"/>
                 </a:solidFill>
                 <a:latin typeface="微软雅黑"/>
                 <a:ea typeface="微软雅黑"/>
                 <a:cs typeface="微软雅黑"/>
               </a:rPr>
-              <a:t>学习路径</a:t>
+              <a:t>方法</a:t>
             </a:r>
           </a:p>
         </p:txBody>
@@ -5414,6 +5797,133 @@
             <a:ext cx="822960" cy="30480"/>
           </a:xfrm>
           <a:prstGeom prst="rect">
+            <a:avLst/>
+          </a:prstGeom>
+          <a:solidFill>
+            <a:srgbClr val="B23A2A"/>
+          </a:solidFill>
+          <a:ln>
+            <a:noFill/>
+          </a:ln>
+          <a:effectLst/>
+        </p:spPr>
+        <p:style>
+          <a:lnRef idx="1">
+            <a:schemeClr val="accent1"/>
+          </a:lnRef>
+          <a:fillRef idx="3">
+            <a:schemeClr val="accent1"/>
+          </a:fillRef>
+          <a:effectRef idx="2">
+            <a:schemeClr val="accent1"/>
+          </a:effectRef>
+          <a:fontRef idx="minor">
+            <a:schemeClr val="lt1"/>
+          </a:fontRef>
+        </p:style>
+        <p:txBody>
+          <a:bodyPr rtlCol="0" anchor="ctr"/>
+          <a:lstStyle/>
+          <a:p>
+            <a:pPr algn="ctr"/>
+          </a:p>
+        </p:txBody>
+      </p:sp>
+      <p:sp>
+        <p:nvSpPr>
+          <p:cNvPr id="5" name="TextBox 4"/>
+          <p:cNvSpPr txBox="1"/>
+          <p:nvPr/>
+        </p:nvSpPr>
+        <p:spPr>
+          <a:xfrm>
+            <a:off x="640080" y="1325880"/>
+            <a:ext cx="10515600" cy="548640"/>
+          </a:xfrm>
+          <a:prstGeom prst="rect">
+            <a:avLst/>
+          </a:prstGeom>
+          <a:noFill/>
+        </p:spPr>
+        <p:txBody>
+          <a:bodyPr wrap="square" anchor="t" lIns="0" rIns="0" tIns="0" bIns="0">
+            <a:spAutoFit/>
+          </a:bodyPr>
+          <a:lstStyle/>
+          <a:p>
+            <a:pPr algn="l"/>
+            <a:r>
+              <a:rPr sz="2800" b="1">
+                <a:solidFill>
+                  <a:srgbClr val="1C2A33"/>
+                </a:solidFill>
+                <a:latin typeface="楷体"/>
+                <a:ea typeface="楷体"/>
+                <a:cs typeface="楷体"/>
+              </a:rPr>
+              <a:t>本课方法</a:t>
+            </a:r>
+          </a:p>
+        </p:txBody>
+      </p:sp>
+      <p:sp>
+        <p:nvSpPr>
+          <p:cNvPr id="6" name="Rounded Rectangle 5"/>
+          <p:cNvSpPr/>
+          <p:nvPr/>
+        </p:nvSpPr>
+        <p:spPr>
+          <a:xfrm>
+            <a:off x="640080" y="2194560"/>
+            <a:ext cx="2453563" cy="3931920"/>
+          </a:xfrm>
+          <a:prstGeom prst="roundRect">
+            <a:avLst/>
+          </a:prstGeom>
+          <a:solidFill>
+            <a:srgbClr val="FFFFFF"/>
+          </a:solidFill>
+          <a:ln w="20320">
+            <a:solidFill>
+              <a:srgbClr val="2E7D6B"/>
+            </a:solidFill>
+          </a:ln>
+          <a:effectLst/>
+        </p:spPr>
+        <p:style>
+          <a:lnRef idx="1">
+            <a:schemeClr val="accent1"/>
+          </a:lnRef>
+          <a:fillRef idx="3">
+            <a:schemeClr val="accent1"/>
+          </a:fillRef>
+          <a:effectRef idx="2">
+            <a:schemeClr val="accent1"/>
+          </a:effectRef>
+          <a:fontRef idx="minor">
+            <a:schemeClr val="lt1"/>
+          </a:fontRef>
+        </p:style>
+        <p:txBody>
+          <a:bodyPr rtlCol="0" anchor="ctr"/>
+          <a:lstStyle/>
+          <a:p>
+            <a:pPr algn="ctr"/>
+          </a:p>
+        </p:txBody>
+      </p:sp>
+      <p:sp>
+        <p:nvSpPr>
+          <p:cNvPr id="7" name="Oval 6"/>
+          <p:cNvSpPr/>
+          <p:nvPr/>
+        </p:nvSpPr>
+        <p:spPr>
+          <a:xfrm>
+            <a:off x="822960" y="2395728"/>
+            <a:ext cx="502920" cy="502920"/>
+          </a:xfrm>
+          <a:prstGeom prst="ellipse">
             <a:avLst/>
           </a:prstGeom>
           <a:solidFill>
@@ -5448,14 +5958,133 @@
       </p:sp>
       <p:sp>
         <p:nvSpPr>
-          <p:cNvPr id="5" name="Rounded Rectangle 4"/>
+          <p:cNvPr id="8" name="TextBox 7"/>
+          <p:cNvSpPr txBox="1"/>
+          <p:nvPr/>
+        </p:nvSpPr>
+        <p:spPr>
+          <a:xfrm>
+            <a:off x="822960" y="2450592"/>
+            <a:ext cx="502920" cy="384048"/>
+          </a:xfrm>
+          <a:prstGeom prst="rect">
+            <a:avLst/>
+          </a:prstGeom>
+          <a:noFill/>
+        </p:spPr>
+        <p:txBody>
+          <a:bodyPr wrap="square" anchor="t" lIns="0" rIns="0" tIns="0" bIns="0">
+            <a:spAutoFit/>
+          </a:bodyPr>
+          <a:lstStyle/>
+          <a:p>
+            <a:pPr algn="ctr"/>
+            <a:r>
+              <a:rPr sz="1800" b="1">
+                <a:solidFill>
+                  <a:srgbClr val="FFFFFF"/>
+                </a:solidFill>
+                <a:latin typeface="微软雅黑"/>
+                <a:ea typeface="微软雅黑"/>
+                <a:cs typeface="微软雅黑"/>
+              </a:rPr>
+              <a:t>1</a:t>
+            </a:r>
+          </a:p>
+        </p:txBody>
+      </p:sp>
+      <p:sp>
+        <p:nvSpPr>
+          <p:cNvPr id="9" name="TextBox 8"/>
+          <p:cNvSpPr txBox="1"/>
+          <p:nvPr/>
+        </p:nvSpPr>
+        <p:spPr>
+          <a:xfrm>
+            <a:off x="1463040" y="2414016"/>
+            <a:ext cx="1447723" cy="548640"/>
+          </a:xfrm>
+          <a:prstGeom prst="rect">
+            <a:avLst/>
+          </a:prstGeom>
+          <a:noFill/>
+        </p:spPr>
+        <p:txBody>
+          <a:bodyPr wrap="square" anchor="t" lIns="0" rIns="0" tIns="0" bIns="0">
+            <a:spAutoFit/>
+          </a:bodyPr>
+          <a:lstStyle/>
+          <a:p>
+            <a:pPr algn="l">
+              <a:lnSpc>
+                <a:spcPct val="120000"/>
+              </a:lnSpc>
+            </a:pPr>
+            <a:r>
+              <a:rPr sz="1500" b="1">
+                <a:solidFill>
+                  <a:srgbClr val="2E7D6B"/>
+                </a:solidFill>
+                <a:latin typeface="微软雅黑"/>
+                <a:ea typeface="微软雅黑"/>
+                <a:cs typeface="微软雅黑"/>
+              </a:rPr>
+              <a:t>① 情节图法</a:t>
+            </a:r>
+          </a:p>
+        </p:txBody>
+      </p:sp>
+      <p:sp>
+        <p:nvSpPr>
+          <p:cNvPr id="10" name="TextBox 9"/>
+          <p:cNvSpPr txBox="1"/>
+          <p:nvPr/>
+        </p:nvSpPr>
+        <p:spPr>
+          <a:xfrm>
+            <a:off x="914400" y="3200400"/>
+            <a:ext cx="1904923" cy="2743200"/>
+          </a:xfrm>
+          <a:prstGeom prst="rect">
+            <a:avLst/>
+          </a:prstGeom>
+          <a:noFill/>
+        </p:spPr>
+        <p:txBody>
+          <a:bodyPr wrap="square" anchor="t" lIns="0" rIns="0" tIns="0" bIns="0">
+            <a:spAutoFit/>
+          </a:bodyPr>
+          <a:lstStyle/>
+          <a:p>
+            <a:pPr algn="l">
+              <a:lnSpc>
+                <a:spcPct val="150000"/>
+              </a:lnSpc>
+            </a:pPr>
+            <a:r>
+              <a:rPr sz="1300" b="0">
+                <a:solidFill>
+                  <a:srgbClr val="1C2A33"/>
+                </a:solidFill>
+                <a:latin typeface="楷体"/>
+                <a:ea typeface="楷体"/>
+                <a:cs typeface="楷体"/>
+              </a:rPr>
+              <a:t>五节点</a:t>
+            </a:r>
+          </a:p>
+        </p:txBody>
+      </p:sp>
+      <p:sp>
+        <p:nvSpPr>
+          <p:cNvPr id="11" name="Rounded Rectangle 10"/>
           <p:cNvSpPr/>
           <p:nvPr/>
         </p:nvSpPr>
         <p:spPr>
           <a:xfrm>
-            <a:off x="640080" y="1371600"/>
-            <a:ext cx="10911535" cy="685800"/>
+            <a:off x="3459403" y="2194560"/>
+            <a:ext cx="2453563" cy="3931920"/>
           </a:xfrm>
           <a:prstGeom prst="roundRect">
             <a:avLst/>
@@ -5463,7 +6092,7 @@
           <a:solidFill>
             <a:srgbClr val="FFFFFF"/>
           </a:solidFill>
-          <a:ln w="22860">
+          <a:ln w="20320">
             <a:solidFill>
               <a:srgbClr val="2E7D6B"/>
             </a:solidFill>
@@ -5494,14 +6123,14 @@
       </p:sp>
       <p:sp>
         <p:nvSpPr>
-          <p:cNvPr id="6" name="Oval 5"/>
+          <p:cNvPr id="12" name="Oval 11"/>
           <p:cNvSpPr/>
           <p:nvPr/>
         </p:nvSpPr>
         <p:spPr>
           <a:xfrm>
-            <a:off x="804672" y="1536192"/>
-            <a:ext cx="457200" cy="457200"/>
+            <a:off x="3642283" y="2395728"/>
+            <a:ext cx="502920" cy="502920"/>
           </a:xfrm>
           <a:prstGeom prst="ellipse">
             <a:avLst/>
@@ -5538,14 +6167,14 @@
       </p:sp>
       <p:sp>
         <p:nvSpPr>
-          <p:cNvPr id="7" name="TextBox 6"/>
+          <p:cNvPr id="13" name="TextBox 12"/>
           <p:cNvSpPr txBox="1"/>
           <p:nvPr/>
         </p:nvSpPr>
         <p:spPr>
           <a:xfrm>
-            <a:off x="804672" y="1591056"/>
-            <a:ext cx="457200" cy="384048"/>
+            <a:off x="3642283" y="2450592"/>
+            <a:ext cx="502920" cy="384048"/>
           </a:xfrm>
           <a:prstGeom prst="rect">
             <a:avLst/>
@@ -5560,7 +6189,7 @@
           <a:p>
             <a:pPr algn="ctr"/>
             <a:r>
-              <a:rPr sz="1600" b="1">
+              <a:rPr sz="1800" b="1">
                 <a:solidFill>
                   <a:srgbClr val="FFFFFF"/>
                 </a:solidFill>
@@ -5568,21 +6197,21 @@
                 <a:ea typeface="微软雅黑"/>
                 <a:cs typeface="微软雅黑"/>
               </a:rPr>
-              <a:t>1</a:t>
-            </a:r>
-          </a:p>
-        </p:txBody>
-      </p:sp>
-      <p:sp>
-        <p:nvSpPr>
-          <p:cNvPr id="8" name="TextBox 7"/>
+              <a:t>2</a:t>
+            </a:r>
+          </a:p>
+        </p:txBody>
+      </p:sp>
+      <p:sp>
+        <p:nvSpPr>
+          <p:cNvPr id="14" name="TextBox 13"/>
           <p:cNvSpPr txBox="1"/>
           <p:nvPr/>
         </p:nvSpPr>
         <p:spPr>
           <a:xfrm>
-            <a:off x="1371600" y="1481328"/>
-            <a:ext cx="9997135" cy="484632"/>
+            <a:off x="4282363" y="2414016"/>
+            <a:ext cx="1447723" cy="548640"/>
           </a:xfrm>
           <a:prstGeom prst="rect">
             <a:avLst/>
@@ -5597,33 +6226,74 @@
           <a:p>
             <a:pPr algn="l">
               <a:lnSpc>
-                <a:spcPct val="110000"/>
+                <a:spcPct val="120000"/>
               </a:lnSpc>
             </a:pPr>
             <a:r>
-              <a:rPr sz="1600" b="1">
-                <a:solidFill>
-                  <a:srgbClr val="1C2A33"/>
+              <a:rPr sz="1500" b="1">
+                <a:solidFill>
+                  <a:srgbClr val="2E7D6B"/>
                 </a:solidFill>
                 <a:latin typeface="微软雅黑"/>
                 <a:ea typeface="微软雅黑"/>
                 <a:cs typeface="微软雅黑"/>
               </a:rPr>
-              <a:t>Step 1 导入</a:t>
-            </a:r>
-          </a:p>
-        </p:txBody>
-      </p:sp>
-      <p:sp>
-        <p:nvSpPr>
-          <p:cNvPr id="9" name="Rounded Rectangle 8"/>
+              <a:t>② 细节解码法</a:t>
+            </a:r>
+          </a:p>
+        </p:txBody>
+      </p:sp>
+      <p:sp>
+        <p:nvSpPr>
+          <p:cNvPr id="15" name="TextBox 14"/>
+          <p:cNvSpPr txBox="1"/>
+          <p:nvPr/>
+        </p:nvSpPr>
+        <p:spPr>
+          <a:xfrm>
+            <a:off x="3733723" y="3200400"/>
+            <a:ext cx="1904923" cy="2743200"/>
+          </a:xfrm>
+          <a:prstGeom prst="rect">
+            <a:avLst/>
+          </a:prstGeom>
+          <a:noFill/>
+        </p:spPr>
+        <p:txBody>
+          <a:bodyPr wrap="square" anchor="t" lIns="0" rIns="0" tIns="0" bIns="0">
+            <a:spAutoFit/>
+          </a:bodyPr>
+          <a:lstStyle/>
+          <a:p>
+            <a:pPr algn="l">
+              <a:lnSpc>
+                <a:spcPct val="150000"/>
+              </a:lnSpc>
+            </a:pPr>
+            <a:r>
+              <a:rPr sz="1300" b="0">
+                <a:solidFill>
+                  <a:srgbClr val="1C2A33"/>
+                </a:solidFill>
+                <a:latin typeface="楷体"/>
+                <a:ea typeface="楷体"/>
+                <a:cs typeface="楷体"/>
+              </a:rPr>
+              <a:t>动作写人</a:t>
+            </a:r>
+          </a:p>
+        </p:txBody>
+      </p:sp>
+      <p:sp>
+        <p:nvSpPr>
+          <p:cNvPr id="16" name="Rounded Rectangle 15"/>
           <p:cNvSpPr/>
           <p:nvPr/>
         </p:nvSpPr>
         <p:spPr>
           <a:xfrm>
-            <a:off x="640080" y="2194560"/>
-            <a:ext cx="10911535" cy="685800"/>
+            <a:off x="6278727" y="2194560"/>
+            <a:ext cx="2453563" cy="3931920"/>
           </a:xfrm>
           <a:prstGeom prst="roundRect">
             <a:avLst/>
@@ -5631,7 +6301,7 @@
           <a:solidFill>
             <a:srgbClr val="FFFFFF"/>
           </a:solidFill>
-          <a:ln w="22860">
+          <a:ln w="20320">
             <a:solidFill>
               <a:srgbClr val="2E7D6B"/>
             </a:solidFill>
@@ -5662,14 +6332,14 @@
       </p:sp>
       <p:sp>
         <p:nvSpPr>
-          <p:cNvPr id="10" name="Oval 9"/>
+          <p:cNvPr id="17" name="Oval 16"/>
           <p:cNvSpPr/>
           <p:nvPr/>
         </p:nvSpPr>
         <p:spPr>
           <a:xfrm>
-            <a:off x="804672" y="2359152"/>
-            <a:ext cx="457200" cy="457200"/>
+            <a:off x="6461607" y="2395728"/>
+            <a:ext cx="502920" cy="502920"/>
           </a:xfrm>
           <a:prstGeom prst="ellipse">
             <a:avLst/>
@@ -5706,14 +6376,14 @@
       </p:sp>
       <p:sp>
         <p:nvSpPr>
-          <p:cNvPr id="11" name="TextBox 10"/>
+          <p:cNvPr id="18" name="TextBox 17"/>
           <p:cNvSpPr txBox="1"/>
           <p:nvPr/>
         </p:nvSpPr>
         <p:spPr>
           <a:xfrm>
-            <a:off x="804672" y="2414016"/>
-            <a:ext cx="457200" cy="384048"/>
+            <a:off x="6461607" y="2450592"/>
+            <a:ext cx="502920" cy="384048"/>
           </a:xfrm>
           <a:prstGeom prst="rect">
             <a:avLst/>
@@ -5728,7 +6398,7 @@
           <a:p>
             <a:pPr algn="ctr"/>
             <a:r>
-              <a:rPr sz="1600" b="1">
+              <a:rPr sz="1800" b="1">
                 <a:solidFill>
                   <a:srgbClr val="FFFFFF"/>
                 </a:solidFill>
@@ -5736,21 +6406,21 @@
                 <a:ea typeface="微软雅黑"/>
                 <a:cs typeface="微软雅黑"/>
               </a:rPr>
-              <a:t>2</a:t>
-            </a:r>
-          </a:p>
-        </p:txBody>
-      </p:sp>
-      <p:sp>
-        <p:nvSpPr>
-          <p:cNvPr id="12" name="TextBox 11"/>
+              <a:t>3</a:t>
+            </a:r>
+          </a:p>
+        </p:txBody>
+      </p:sp>
+      <p:sp>
+        <p:nvSpPr>
+          <p:cNvPr id="19" name="TextBox 18"/>
           <p:cNvSpPr txBox="1"/>
           <p:nvPr/>
         </p:nvSpPr>
         <p:spPr>
           <a:xfrm>
-            <a:off x="1371600" y="2304288"/>
-            <a:ext cx="9997135" cy="484632"/>
+            <a:off x="7101687" y="2414016"/>
+            <a:ext cx="1447723" cy="548640"/>
           </a:xfrm>
           <a:prstGeom prst="rect">
             <a:avLst/>
@@ -5765,33 +6435,74 @@
           <a:p>
             <a:pPr algn="l">
               <a:lnSpc>
-                <a:spcPct val="110000"/>
+                <a:spcPct val="120000"/>
               </a:lnSpc>
             </a:pPr>
             <a:r>
-              <a:rPr sz="1600" b="1">
-                <a:solidFill>
-                  <a:srgbClr val="1C2A33"/>
+              <a:rPr sz="1500" b="1">
+                <a:solidFill>
+                  <a:srgbClr val="2E7D6B"/>
                 </a:solidFill>
                 <a:latin typeface="微软雅黑"/>
                 <a:ea typeface="微软雅黑"/>
                 <a:cs typeface="微软雅黑"/>
               </a:rPr>
-              <a:t>Step 2 情节链</a:t>
-            </a:r>
-          </a:p>
-        </p:txBody>
-      </p:sp>
-      <p:sp>
-        <p:nvSpPr>
-          <p:cNvPr id="13" name="Rounded Rectangle 12"/>
+              <a:t>③ 人物对比法</a:t>
+            </a:r>
+          </a:p>
+        </p:txBody>
+      </p:sp>
+      <p:sp>
+        <p:nvSpPr>
+          <p:cNvPr id="20" name="TextBox 19"/>
+          <p:cNvSpPr txBox="1"/>
+          <p:nvPr/>
+        </p:nvSpPr>
+        <p:spPr>
+          <a:xfrm>
+            <a:off x="6553047" y="3200400"/>
+            <a:ext cx="1904923" cy="2743200"/>
+          </a:xfrm>
+          <a:prstGeom prst="rect">
+            <a:avLst/>
+          </a:prstGeom>
+          <a:noFill/>
+        </p:spPr>
+        <p:txBody>
+          <a:bodyPr wrap="square" anchor="t" lIns="0" rIns="0" tIns="0" bIns="0">
+            <a:spAutoFit/>
+          </a:bodyPr>
+          <a:lstStyle/>
+          <a:p>
+            <a:pPr algn="l">
+              <a:lnSpc>
+                <a:spcPct val="150000"/>
+              </a:lnSpc>
+            </a:pPr>
+            <a:r>
+              <a:rPr sz="1300" b="0">
+                <a:solidFill>
+                  <a:srgbClr val="1C2A33"/>
+                </a:solidFill>
+                <a:latin typeface="楷体"/>
+                <a:ea typeface="楷体"/>
+                <a:cs typeface="楷体"/>
+              </a:rPr>
+              <a:t>—</a:t>
+            </a:r>
+          </a:p>
+        </p:txBody>
+      </p:sp>
+      <p:sp>
+        <p:nvSpPr>
+          <p:cNvPr id="21" name="Rounded Rectangle 20"/>
           <p:cNvSpPr/>
           <p:nvPr/>
         </p:nvSpPr>
         <p:spPr>
           <a:xfrm>
-            <a:off x="640080" y="3017520"/>
-            <a:ext cx="10911535" cy="685800"/>
+            <a:off x="9098051" y="2194560"/>
+            <a:ext cx="2453563" cy="3931920"/>
           </a:xfrm>
           <a:prstGeom prst="roundRect">
             <a:avLst/>
@@ -5799,7 +6510,7 @@
           <a:solidFill>
             <a:srgbClr val="FFFFFF"/>
           </a:solidFill>
-          <a:ln w="22860">
+          <a:ln w="20320">
             <a:solidFill>
               <a:srgbClr val="2E7D6B"/>
             </a:solidFill>
@@ -5830,14 +6541,14 @@
       </p:sp>
       <p:sp>
         <p:nvSpPr>
-          <p:cNvPr id="14" name="Oval 13"/>
+          <p:cNvPr id="22" name="Oval 21"/>
           <p:cNvSpPr/>
           <p:nvPr/>
         </p:nvSpPr>
         <p:spPr>
           <a:xfrm>
-            <a:off x="804672" y="3182112"/>
-            <a:ext cx="457200" cy="457200"/>
+            <a:off x="9280931" y="2395728"/>
+            <a:ext cx="502920" cy="502920"/>
           </a:xfrm>
           <a:prstGeom prst="ellipse">
             <a:avLst/>
@@ -5874,14 +6585,14 @@
       </p:sp>
       <p:sp>
         <p:nvSpPr>
-          <p:cNvPr id="15" name="TextBox 14"/>
+          <p:cNvPr id="23" name="TextBox 22"/>
           <p:cNvSpPr txBox="1"/>
           <p:nvPr/>
         </p:nvSpPr>
         <p:spPr>
           <a:xfrm>
-            <a:off x="804672" y="3236976"/>
-            <a:ext cx="457200" cy="384048"/>
+            <a:off x="9280931" y="2450592"/>
+            <a:ext cx="502920" cy="384048"/>
           </a:xfrm>
           <a:prstGeom prst="rect">
             <a:avLst/>
@@ -5896,7 +6607,7 @@
           <a:p>
             <a:pPr algn="ctr"/>
             <a:r>
-              <a:rPr sz="1600" b="1">
+              <a:rPr sz="1800" b="1">
                 <a:solidFill>
                   <a:srgbClr val="FFFFFF"/>
                 </a:solidFill>
@@ -5904,21 +6615,21 @@
                 <a:ea typeface="微软雅黑"/>
                 <a:cs typeface="微软雅黑"/>
               </a:rPr>
-              <a:t>3</a:t>
-            </a:r>
-          </a:p>
-        </p:txBody>
-      </p:sp>
-      <p:sp>
-        <p:nvSpPr>
-          <p:cNvPr id="16" name="TextBox 15"/>
+              <a:t>4</a:t>
+            </a:r>
+          </a:p>
+        </p:txBody>
+      </p:sp>
+      <p:sp>
+        <p:nvSpPr>
+          <p:cNvPr id="24" name="TextBox 23"/>
           <p:cNvSpPr txBox="1"/>
           <p:nvPr/>
         </p:nvSpPr>
         <p:spPr>
           <a:xfrm>
-            <a:off x="1371600" y="3127248"/>
-            <a:ext cx="9997135" cy="484632"/>
+            <a:off x="9921011" y="2414016"/>
+            <a:ext cx="1447723" cy="548640"/>
           </a:xfrm>
           <a:prstGeom prst="rect">
             <a:avLst/>
@@ -5933,123 +6644,33 @@
           <a:p>
             <a:pPr algn="l">
               <a:lnSpc>
-                <a:spcPct val="110000"/>
+                <a:spcPct val="120000"/>
               </a:lnSpc>
             </a:pPr>
             <a:r>
-              <a:rPr sz="1600" b="1">
-                <a:solidFill>
-                  <a:srgbClr val="1C2A33"/>
+              <a:rPr sz="1500" b="1">
+                <a:solidFill>
+                  <a:srgbClr val="2E7D6B"/>
                 </a:solidFill>
                 <a:latin typeface="微软雅黑"/>
                 <a:ea typeface="微软雅黑"/>
                 <a:cs typeface="微软雅黑"/>
               </a:rPr>
-              <a:t>Step 3 细节写人</a:t>
-            </a:r>
-          </a:p>
-        </p:txBody>
-      </p:sp>
-      <p:sp>
-        <p:nvSpPr>
-          <p:cNvPr id="17" name="Rounded Rectangle 16"/>
-          <p:cNvSpPr/>
-          <p:nvPr/>
-        </p:nvSpPr>
-        <p:spPr>
-          <a:xfrm>
-            <a:off x="640080" y="3840480"/>
-            <a:ext cx="10911535" cy="685800"/>
-          </a:xfrm>
-          <a:prstGeom prst="roundRect">
-            <a:avLst/>
-          </a:prstGeom>
-          <a:solidFill>
-            <a:srgbClr val="FFFFFF"/>
-          </a:solidFill>
-          <a:ln w="22860">
-            <a:solidFill>
-              <a:srgbClr val="2E7D6B"/>
-            </a:solidFill>
-          </a:ln>
-          <a:effectLst/>
-        </p:spPr>
-        <p:style>
-          <a:lnRef idx="1">
-            <a:schemeClr val="accent1"/>
-          </a:lnRef>
-          <a:fillRef idx="3">
-            <a:schemeClr val="accent1"/>
-          </a:fillRef>
-          <a:effectRef idx="2">
-            <a:schemeClr val="accent1"/>
-          </a:effectRef>
-          <a:fontRef idx="minor">
-            <a:schemeClr val="lt1"/>
-          </a:fontRef>
-        </p:style>
-        <p:txBody>
-          <a:bodyPr rtlCol="0" anchor="ctr"/>
-          <a:lstStyle/>
-          <a:p>
-            <a:pPr algn="ctr"/>
-          </a:p>
-        </p:txBody>
-      </p:sp>
-      <p:sp>
-        <p:nvSpPr>
-          <p:cNvPr id="18" name="Oval 17"/>
-          <p:cNvSpPr/>
-          <p:nvPr/>
-        </p:nvSpPr>
-        <p:spPr>
-          <a:xfrm>
-            <a:off x="804672" y="4005072"/>
-            <a:ext cx="457200" cy="457200"/>
-          </a:xfrm>
-          <a:prstGeom prst="ellipse">
-            <a:avLst/>
-          </a:prstGeom>
-          <a:solidFill>
-            <a:srgbClr val="2E7D6B"/>
-          </a:solidFill>
-          <a:ln>
-            <a:noFill/>
-          </a:ln>
-          <a:effectLst/>
-        </p:spPr>
-        <p:style>
-          <a:lnRef idx="1">
-            <a:schemeClr val="accent1"/>
-          </a:lnRef>
-          <a:fillRef idx="3">
-            <a:schemeClr val="accent1"/>
-          </a:fillRef>
-          <a:effectRef idx="2">
-            <a:schemeClr val="accent1"/>
-          </a:effectRef>
-          <a:fontRef idx="minor">
-            <a:schemeClr val="lt1"/>
-          </a:fontRef>
-        </p:style>
-        <p:txBody>
-          <a:bodyPr rtlCol="0" anchor="ctr"/>
-          <a:lstStyle/>
-          <a:p>
-            <a:pPr algn="ctr"/>
-          </a:p>
-        </p:txBody>
-      </p:sp>
-      <p:sp>
-        <p:nvSpPr>
-          <p:cNvPr id="19" name="TextBox 18"/>
+              <a:t>④ 诵读法（樊哙段）</a:t>
+            </a:r>
+          </a:p>
+        </p:txBody>
+      </p:sp>
+      <p:sp>
+        <p:nvSpPr>
+          <p:cNvPr id="25" name="TextBox 24"/>
           <p:cNvSpPr txBox="1"/>
           <p:nvPr/>
         </p:nvSpPr>
         <p:spPr>
           <a:xfrm>
-            <a:off x="804672" y="4059936"/>
-            <a:ext cx="457200" cy="384048"/>
+            <a:off x="9372371" y="3200400"/>
+            <a:ext cx="1904923" cy="2743200"/>
           </a:xfrm>
           <a:prstGeom prst="rect">
             <a:avLst/>
@@ -6062,401 +6683,28 @@
           </a:bodyPr>
           <a:lstStyle/>
           <a:p>
-            <a:pPr algn="ctr"/>
-            <a:r>
-              <a:rPr sz="1600" b="1">
-                <a:solidFill>
-                  <a:srgbClr val="FFFFFF"/>
-                </a:solidFill>
-                <a:latin typeface="微软雅黑"/>
-                <a:ea typeface="微软雅黑"/>
-                <a:cs typeface="微软雅黑"/>
-              </a:rPr>
-              <a:t>4</a:t>
-            </a:r>
-          </a:p>
-        </p:txBody>
-      </p:sp>
-      <p:sp>
-        <p:nvSpPr>
-          <p:cNvPr id="20" name="TextBox 19"/>
-          <p:cNvSpPr txBox="1"/>
-          <p:nvPr/>
-        </p:nvSpPr>
-        <p:spPr>
-          <a:xfrm>
-            <a:off x="1371600" y="3950208"/>
-            <a:ext cx="9997135" cy="484632"/>
-          </a:xfrm>
-          <a:prstGeom prst="rect">
-            <a:avLst/>
-          </a:prstGeom>
-          <a:noFill/>
-        </p:spPr>
-        <p:txBody>
-          <a:bodyPr wrap="square" anchor="t" lIns="0" rIns="0" tIns="0" bIns="0">
-            <a:spAutoFit/>
-          </a:bodyPr>
-          <a:lstStyle/>
-          <a:p>
             <a:pPr algn="l">
               <a:lnSpc>
-                <a:spcPct val="110000"/>
+                <a:spcPct val="150000"/>
               </a:lnSpc>
             </a:pPr>
             <a:r>
-              <a:rPr sz="1600" b="1">
+              <a:rPr sz="1300" b="0">
                 <a:solidFill>
                   <a:srgbClr val="1C2A33"/>
                 </a:solidFill>
-                <a:latin typeface="微软雅黑"/>
-                <a:ea typeface="微软雅黑"/>
-                <a:cs typeface="微软雅黑"/>
-              </a:rPr>
-              <a:t>Step 4 人物对比</a:t>
-            </a:r>
-          </a:p>
-        </p:txBody>
-      </p:sp>
-      <p:sp>
-        <p:nvSpPr>
-          <p:cNvPr id="21" name="Rounded Rectangle 20"/>
-          <p:cNvSpPr/>
-          <p:nvPr/>
-        </p:nvSpPr>
-        <p:spPr>
-          <a:xfrm>
-            <a:off x="640080" y="4663440"/>
-            <a:ext cx="10911535" cy="685800"/>
-          </a:xfrm>
-          <a:prstGeom prst="roundRect">
-            <a:avLst/>
-          </a:prstGeom>
-          <a:solidFill>
-            <a:srgbClr val="FFFFFF"/>
-          </a:solidFill>
-          <a:ln w="22860">
-            <a:solidFill>
-              <a:srgbClr val="2E7D6B"/>
-            </a:solidFill>
-          </a:ln>
-          <a:effectLst/>
-        </p:spPr>
-        <p:style>
-          <a:lnRef idx="1">
-            <a:schemeClr val="accent1"/>
-          </a:lnRef>
-          <a:fillRef idx="3">
-            <a:schemeClr val="accent1"/>
-          </a:fillRef>
-          <a:effectRef idx="2">
-            <a:schemeClr val="accent1"/>
-          </a:effectRef>
-          <a:fontRef idx="minor">
-            <a:schemeClr val="lt1"/>
-          </a:fontRef>
-        </p:style>
-        <p:txBody>
-          <a:bodyPr rtlCol="0" anchor="ctr"/>
-          <a:lstStyle/>
-          <a:p>
-            <a:pPr algn="ctr"/>
-          </a:p>
-        </p:txBody>
-      </p:sp>
-      <p:sp>
-        <p:nvSpPr>
-          <p:cNvPr id="22" name="Oval 21"/>
-          <p:cNvSpPr/>
-          <p:nvPr/>
-        </p:nvSpPr>
-        <p:spPr>
-          <a:xfrm>
-            <a:off x="804672" y="4828032"/>
-            <a:ext cx="457200" cy="457200"/>
-          </a:xfrm>
-          <a:prstGeom prst="ellipse">
-            <a:avLst/>
-          </a:prstGeom>
-          <a:solidFill>
-            <a:srgbClr val="2E7D6B"/>
-          </a:solidFill>
-          <a:ln>
-            <a:noFill/>
-          </a:ln>
-          <a:effectLst/>
-        </p:spPr>
-        <p:style>
-          <a:lnRef idx="1">
-            <a:schemeClr val="accent1"/>
-          </a:lnRef>
-          <a:fillRef idx="3">
-            <a:schemeClr val="accent1"/>
-          </a:fillRef>
-          <a:effectRef idx="2">
-            <a:schemeClr val="accent1"/>
-          </a:effectRef>
-          <a:fontRef idx="minor">
-            <a:schemeClr val="lt1"/>
-          </a:fontRef>
-        </p:style>
-        <p:txBody>
-          <a:bodyPr rtlCol="0" anchor="ctr"/>
-          <a:lstStyle/>
-          <a:p>
-            <a:pPr algn="ctr"/>
-          </a:p>
-        </p:txBody>
-      </p:sp>
-      <p:sp>
-        <p:nvSpPr>
-          <p:cNvPr id="23" name="TextBox 22"/>
-          <p:cNvSpPr txBox="1"/>
-          <p:nvPr/>
-        </p:nvSpPr>
-        <p:spPr>
-          <a:xfrm>
-            <a:off x="804672" y="4882896"/>
-            <a:ext cx="457200" cy="384048"/>
-          </a:xfrm>
-          <a:prstGeom prst="rect">
-            <a:avLst/>
-          </a:prstGeom>
-          <a:noFill/>
-        </p:spPr>
-        <p:txBody>
-          <a:bodyPr wrap="square" anchor="t" lIns="0" rIns="0" tIns="0" bIns="0">
-            <a:spAutoFit/>
-          </a:bodyPr>
-          <a:lstStyle/>
-          <a:p>
-            <a:pPr algn="ctr"/>
-            <a:r>
-              <a:rPr sz="1600" b="1">
-                <a:solidFill>
-                  <a:srgbClr val="FFFFFF"/>
-                </a:solidFill>
-                <a:latin typeface="微软雅黑"/>
-                <a:ea typeface="微软雅黑"/>
-                <a:cs typeface="微软雅黑"/>
-              </a:rPr>
-              <a:t>5</a:t>
-            </a:r>
-          </a:p>
-        </p:txBody>
-      </p:sp>
-      <p:sp>
-        <p:nvSpPr>
-          <p:cNvPr id="24" name="TextBox 23"/>
-          <p:cNvSpPr txBox="1"/>
-          <p:nvPr/>
-        </p:nvSpPr>
-        <p:spPr>
-          <a:xfrm>
-            <a:off x="1371600" y="4773168"/>
-            <a:ext cx="9997135" cy="484632"/>
-          </a:xfrm>
-          <a:prstGeom prst="rect">
-            <a:avLst/>
-          </a:prstGeom>
-          <a:noFill/>
-        </p:spPr>
-        <p:txBody>
-          <a:bodyPr wrap="square" anchor="t" lIns="0" rIns="0" tIns="0" bIns="0">
-            <a:spAutoFit/>
-          </a:bodyPr>
-          <a:lstStyle/>
-          <a:p>
-            <a:pPr algn="l">
-              <a:lnSpc>
-                <a:spcPct val="110000"/>
-              </a:lnSpc>
-            </a:pPr>
-            <a:r>
-              <a:rPr sz="1600" b="1">
-                <a:solidFill>
-                  <a:srgbClr val="1C2A33"/>
-                </a:solidFill>
-                <a:latin typeface="微软雅黑"/>
-                <a:ea typeface="微软雅黑"/>
-                <a:cs typeface="微软雅黑"/>
-              </a:rPr>
-              <a:t>Step 5 实录精神</a:t>
-            </a:r>
-          </a:p>
-        </p:txBody>
-      </p:sp>
-      <p:sp>
-        <p:nvSpPr>
-          <p:cNvPr id="25" name="Rounded Rectangle 24"/>
-          <p:cNvSpPr/>
-          <p:nvPr/>
-        </p:nvSpPr>
-        <p:spPr>
-          <a:xfrm>
-            <a:off x="640080" y="5486400"/>
-            <a:ext cx="10911535" cy="685800"/>
-          </a:xfrm>
-          <a:prstGeom prst="roundRect">
-            <a:avLst/>
-          </a:prstGeom>
-          <a:solidFill>
-            <a:srgbClr val="FFFFFF"/>
-          </a:solidFill>
-          <a:ln w="22860">
-            <a:solidFill>
-              <a:srgbClr val="2E7D6B"/>
-            </a:solidFill>
-          </a:ln>
-          <a:effectLst/>
-        </p:spPr>
-        <p:style>
-          <a:lnRef idx="1">
-            <a:schemeClr val="accent1"/>
-          </a:lnRef>
-          <a:fillRef idx="3">
-            <a:schemeClr val="accent1"/>
-          </a:fillRef>
-          <a:effectRef idx="2">
-            <a:schemeClr val="accent1"/>
-          </a:effectRef>
-          <a:fontRef idx="minor">
-            <a:schemeClr val="lt1"/>
-          </a:fontRef>
-        </p:style>
-        <p:txBody>
-          <a:bodyPr rtlCol="0" anchor="ctr"/>
-          <a:lstStyle/>
-          <a:p>
-            <a:pPr algn="ctr"/>
-          </a:p>
-        </p:txBody>
-      </p:sp>
-      <p:sp>
-        <p:nvSpPr>
-          <p:cNvPr id="26" name="Oval 25"/>
-          <p:cNvSpPr/>
-          <p:nvPr/>
-        </p:nvSpPr>
-        <p:spPr>
-          <a:xfrm>
-            <a:off x="804672" y="5650992"/>
-            <a:ext cx="457200" cy="457200"/>
-          </a:xfrm>
-          <a:prstGeom prst="ellipse">
-            <a:avLst/>
-          </a:prstGeom>
-          <a:solidFill>
-            <a:srgbClr val="2E7D6B"/>
-          </a:solidFill>
-          <a:ln>
-            <a:noFill/>
-          </a:ln>
-          <a:effectLst/>
-        </p:spPr>
-        <p:style>
-          <a:lnRef idx="1">
-            <a:schemeClr val="accent1"/>
-          </a:lnRef>
-          <a:fillRef idx="3">
-            <a:schemeClr val="accent1"/>
-          </a:fillRef>
-          <a:effectRef idx="2">
-            <a:schemeClr val="accent1"/>
-          </a:effectRef>
-          <a:fontRef idx="minor">
-            <a:schemeClr val="lt1"/>
-          </a:fontRef>
-        </p:style>
-        <p:txBody>
-          <a:bodyPr rtlCol="0" anchor="ctr"/>
-          <a:lstStyle/>
-          <a:p>
-            <a:pPr algn="ctr"/>
-          </a:p>
-        </p:txBody>
-      </p:sp>
-      <p:sp>
-        <p:nvSpPr>
-          <p:cNvPr id="27" name="TextBox 26"/>
-          <p:cNvSpPr txBox="1"/>
-          <p:nvPr/>
-        </p:nvSpPr>
-        <p:spPr>
-          <a:xfrm>
-            <a:off x="804672" y="5705856"/>
-            <a:ext cx="457200" cy="384048"/>
-          </a:xfrm>
-          <a:prstGeom prst="rect">
-            <a:avLst/>
-          </a:prstGeom>
-          <a:noFill/>
-        </p:spPr>
-        <p:txBody>
-          <a:bodyPr wrap="square" anchor="t" lIns="0" rIns="0" tIns="0" bIns="0">
-            <a:spAutoFit/>
-          </a:bodyPr>
-          <a:lstStyle/>
-          <a:p>
-            <a:pPr algn="ctr"/>
-            <a:r>
-              <a:rPr sz="1600" b="1">
-                <a:solidFill>
-                  <a:srgbClr val="FFFFFF"/>
-                </a:solidFill>
-                <a:latin typeface="微软雅黑"/>
-                <a:ea typeface="微软雅黑"/>
-                <a:cs typeface="微软雅黑"/>
-              </a:rPr>
-              <a:t>6</a:t>
-            </a:r>
-          </a:p>
-        </p:txBody>
-      </p:sp>
-      <p:sp>
-        <p:nvSpPr>
-          <p:cNvPr id="28" name="TextBox 27"/>
-          <p:cNvSpPr txBox="1"/>
-          <p:nvPr/>
-        </p:nvSpPr>
-        <p:spPr>
-          <a:xfrm>
-            <a:off x="1371600" y="5596128"/>
-            <a:ext cx="9997135" cy="484632"/>
-          </a:xfrm>
-          <a:prstGeom prst="rect">
-            <a:avLst/>
-          </a:prstGeom>
-          <a:noFill/>
-        </p:spPr>
-        <p:txBody>
-          <a:bodyPr wrap="square" anchor="t" lIns="0" rIns="0" tIns="0" bIns="0">
-            <a:spAutoFit/>
-          </a:bodyPr>
-          <a:lstStyle/>
-          <a:p>
-            <a:pPr algn="l">
-              <a:lnSpc>
-                <a:spcPct val="110000"/>
-              </a:lnSpc>
-            </a:pPr>
-            <a:r>
-              <a:rPr sz="1600" b="1">
-                <a:solidFill>
-                  <a:srgbClr val="1C2A33"/>
-                </a:solidFill>
-                <a:latin typeface="微软雅黑"/>
-                <a:ea typeface="微软雅黑"/>
-                <a:cs typeface="微软雅黑"/>
-              </a:rPr>
-              <a:t>Step 6 小结+作业</a:t>
-            </a:r>
-          </a:p>
-        </p:txBody>
-      </p:sp>
-      <p:sp>
-        <p:nvSpPr>
-          <p:cNvPr id="29" name="TextBox 28"/>
+                <a:latin typeface="楷体"/>
+                <a:ea typeface="楷体"/>
+                <a:cs typeface="楷体"/>
+              </a:rPr>
+              <a:t>—</a:t>
+            </a:r>
+          </a:p>
+        </p:txBody>
+      </p:sp>
+      <p:sp>
+        <p:nvSpPr>
+          <p:cNvPr id="26" name="TextBox 25"/>
           <p:cNvSpPr txBox="1"/>
           <p:nvPr/>
         </p:nvSpPr>
@@ -6589,7 +6837,7 @@
                 <a:ea typeface="微软雅黑"/>
                 <a:cs typeface="微软雅黑"/>
               </a:rPr>
-              <a:t>易混易错</a:t>
+              <a:t>难点</a:t>
             </a:r>
           </a:p>
         </p:txBody>
@@ -6640,14 +6888,51 @@
       </p:sp>
       <p:sp>
         <p:nvSpPr>
-          <p:cNvPr id="5" name="Rounded Rectangle 4"/>
+          <p:cNvPr id="5" name="TextBox 4"/>
+          <p:cNvSpPr txBox="1"/>
+          <p:nvPr/>
+        </p:nvSpPr>
+        <p:spPr>
+          <a:xfrm>
+            <a:off x="640080" y="1325880"/>
+            <a:ext cx="10058400" cy="548640"/>
+          </a:xfrm>
+          <a:prstGeom prst="rect">
+            <a:avLst/>
+          </a:prstGeom>
+          <a:noFill/>
+        </p:spPr>
+        <p:txBody>
+          <a:bodyPr wrap="square" anchor="t" lIns="0" rIns="0" tIns="0" bIns="0">
+            <a:spAutoFit/>
+          </a:bodyPr>
+          <a:lstStyle/>
+          <a:p>
+            <a:pPr algn="l"/>
+            <a:r>
+              <a:rPr sz="2800" b="1">
+                <a:solidFill>
+                  <a:srgbClr val="1C2A33"/>
+                </a:solidFill>
+                <a:latin typeface="楷体"/>
+                <a:ea typeface="楷体"/>
+                <a:cs typeface="楷体"/>
+              </a:rPr>
+              <a:t>本课难点</a:t>
+            </a:r>
+          </a:p>
+        </p:txBody>
+      </p:sp>
+      <p:sp>
+        <p:nvSpPr>
+          <p:cNvPr id="6" name="Rounded Rectangle 5"/>
           <p:cNvSpPr/>
           <p:nvPr/>
         </p:nvSpPr>
         <p:spPr>
           <a:xfrm>
-            <a:off x="640080" y="1417320"/>
-            <a:ext cx="5349240" cy="2057400"/>
+            <a:off x="640080" y="2194560"/>
+            <a:ext cx="3393338" cy="3931920"/>
           </a:xfrm>
           <a:prstGeom prst="roundRect">
             <a:avLst/>
@@ -6655,9 +6940,9 @@
           <a:solidFill>
             <a:srgbClr val="FFFFFF"/>
           </a:solidFill>
-          <a:ln w="22860">
+          <a:ln w="20320">
             <a:solidFill>
-              <a:srgbClr val="B23A2A"/>
+              <a:srgbClr val="C8A86B"/>
             </a:solidFill>
           </a:ln>
           <a:effectLst/>
@@ -6686,20 +6971,20 @@
       </p:sp>
       <p:sp>
         <p:nvSpPr>
-          <p:cNvPr id="6" name="Oval 5"/>
+          <p:cNvPr id="7" name="Oval 6"/>
           <p:cNvSpPr/>
           <p:nvPr/>
         </p:nvSpPr>
         <p:spPr>
           <a:xfrm>
-            <a:off x="804672" y="1581912"/>
-            <a:ext cx="457200" cy="457200"/>
+            <a:off x="868680" y="2423160"/>
+            <a:ext cx="548640" cy="548640"/>
           </a:xfrm>
           <a:prstGeom prst="ellipse">
             <a:avLst/>
           </a:prstGeom>
           <a:solidFill>
-            <a:srgbClr val="B23A2A"/>
+            <a:srgbClr val="C8A86B"/>
           </a:solidFill>
           <a:ln>
             <a:noFill/>
@@ -6730,14 +7015,14 @@
       </p:sp>
       <p:sp>
         <p:nvSpPr>
-          <p:cNvPr id="7" name="TextBox 6"/>
+          <p:cNvPr id="8" name="TextBox 7"/>
           <p:cNvSpPr txBox="1"/>
           <p:nvPr/>
         </p:nvSpPr>
         <p:spPr>
           <a:xfrm>
-            <a:off x="804672" y="1636776"/>
-            <a:ext cx="457200" cy="384048"/>
+            <a:off x="868680" y="2487168"/>
+            <a:ext cx="548640" cy="411480"/>
           </a:xfrm>
           <a:prstGeom prst="rect">
             <a:avLst/>
@@ -6752,7 +7037,7 @@
           <a:p>
             <a:pPr algn="ctr"/>
             <a:r>
-              <a:rPr sz="1600" b="1">
+              <a:rPr sz="2000" b="1">
                 <a:solidFill>
                   <a:srgbClr val="FFFFFF"/>
                 </a:solidFill>
@@ -6760,21 +7045,21 @@
                 <a:ea typeface="微软雅黑"/>
                 <a:cs typeface="微软雅黑"/>
               </a:rPr>
-              <a:t>!</a:t>
-            </a:r>
-          </a:p>
-        </p:txBody>
-      </p:sp>
-      <p:sp>
-        <p:nvSpPr>
-          <p:cNvPr id="8" name="TextBox 7"/>
+              <a:t>1</a:t>
+            </a:r>
+          </a:p>
+        </p:txBody>
+      </p:sp>
+      <p:sp>
+        <p:nvSpPr>
+          <p:cNvPr id="9" name="TextBox 8"/>
           <p:cNvSpPr txBox="1"/>
           <p:nvPr/>
         </p:nvSpPr>
         <p:spPr>
           <a:xfrm>
-            <a:off x="1371600" y="1527048"/>
-            <a:ext cx="4434840" cy="457200"/>
+            <a:off x="1554480" y="2450592"/>
+            <a:ext cx="2296058" cy="731520"/>
           </a:xfrm>
           <a:prstGeom prst="rect">
             <a:avLst/>
@@ -6787,35 +7072,31 @@
           </a:bodyPr>
           <a:lstStyle/>
           <a:p>
-            <a:pPr algn="l">
-              <a:lnSpc>
-                <a:spcPct val="110000"/>
-              </a:lnSpc>
-            </a:pPr>
-            <a:r>
-              <a:rPr sz="1600" b="1">
-                <a:solidFill>
-                  <a:srgbClr val="1C2A33"/>
-                </a:solidFill>
-                <a:latin typeface="微软雅黑"/>
-                <a:ea typeface="微软雅黑"/>
-                <a:cs typeface="微软雅黑"/>
-              </a:rPr>
-              <a:t/>
-            </a:r>
-          </a:p>
-        </p:txBody>
-      </p:sp>
-      <p:sp>
-        <p:nvSpPr>
-          <p:cNvPr id="9" name="TextBox 8"/>
+            <a:pPr algn="l"/>
+            <a:r>
+              <a:rPr sz="1400" b="1">
+                <a:solidFill>
+                  <a:srgbClr val="6B6258"/>
+                </a:solidFill>
+                <a:latin typeface="楷体"/>
+                <a:ea typeface="楷体"/>
+                <a:cs typeface="楷体"/>
+              </a:rPr>
+              <a:t>易卡处</a:t>
+            </a:r>
+          </a:p>
+        </p:txBody>
+      </p:sp>
+      <p:sp>
+        <p:nvSpPr>
+          <p:cNvPr id="10" name="TextBox 9"/>
           <p:cNvSpPr txBox="1"/>
           <p:nvPr/>
         </p:nvSpPr>
         <p:spPr>
           <a:xfrm>
-            <a:off x="1371600" y="1965960"/>
-            <a:ext cx="4434840" cy="1417320"/>
+            <a:off x="914400" y="3200400"/>
+            <a:ext cx="2844698" cy="2743200"/>
           </a:xfrm>
           <a:prstGeom prst="rect">
             <a:avLst/>
@@ -6830,7 +7111,7 @@
           <a:p>
             <a:pPr algn="l">
               <a:lnSpc>
-                <a:spcPct val="128000"/>
+                <a:spcPct val="150000"/>
               </a:lnSpc>
             </a:pPr>
             <a:r>
@@ -6849,14 +7130,14 @@
       </p:sp>
       <p:sp>
         <p:nvSpPr>
-          <p:cNvPr id="10" name="Rounded Rectangle 9"/>
+          <p:cNvPr id="11" name="Rounded Rectangle 10"/>
           <p:cNvSpPr/>
           <p:nvPr/>
         </p:nvSpPr>
         <p:spPr>
           <a:xfrm>
-            <a:off x="6263640" y="1417320"/>
-            <a:ext cx="5349240" cy="2057400"/>
+            <a:off x="4399178" y="2194560"/>
+            <a:ext cx="3393338" cy="3931920"/>
           </a:xfrm>
           <a:prstGeom prst="roundRect">
             <a:avLst/>
@@ -6864,9 +7145,9 @@
           <a:solidFill>
             <a:srgbClr val="FFFFFF"/>
           </a:solidFill>
-          <a:ln w="22860">
+          <a:ln w="20320">
             <a:solidFill>
-              <a:srgbClr val="B23A2A"/>
+              <a:srgbClr val="C8A86B"/>
             </a:solidFill>
           </a:ln>
           <a:effectLst/>
@@ -6895,20 +7176,20 @@
       </p:sp>
       <p:sp>
         <p:nvSpPr>
-          <p:cNvPr id="11" name="Oval 10"/>
+          <p:cNvPr id="12" name="Oval 11"/>
           <p:cNvSpPr/>
           <p:nvPr/>
         </p:nvSpPr>
         <p:spPr>
           <a:xfrm>
-            <a:off x="6428232" y="1581912"/>
-            <a:ext cx="457200" cy="457200"/>
+            <a:off x="4627778" y="2423160"/>
+            <a:ext cx="548640" cy="548640"/>
           </a:xfrm>
           <a:prstGeom prst="ellipse">
             <a:avLst/>
           </a:prstGeom>
           <a:solidFill>
-            <a:srgbClr val="B23A2A"/>
+            <a:srgbClr val="C8A86B"/>
           </a:solidFill>
           <a:ln>
             <a:noFill/>
@@ -6939,14 +7220,14 @@
       </p:sp>
       <p:sp>
         <p:nvSpPr>
-          <p:cNvPr id="12" name="TextBox 11"/>
+          <p:cNvPr id="13" name="TextBox 12"/>
           <p:cNvSpPr txBox="1"/>
           <p:nvPr/>
         </p:nvSpPr>
         <p:spPr>
           <a:xfrm>
-            <a:off x="6428232" y="1636776"/>
-            <a:ext cx="457200" cy="384048"/>
+            <a:off x="4627778" y="2487168"/>
+            <a:ext cx="548640" cy="411480"/>
           </a:xfrm>
           <a:prstGeom prst="rect">
             <a:avLst/>
@@ -6961,7 +7242,7 @@
           <a:p>
             <a:pPr algn="ctr"/>
             <a:r>
-              <a:rPr sz="1600" b="1">
+              <a:rPr sz="2000" b="1">
                 <a:solidFill>
                   <a:srgbClr val="FFFFFF"/>
                 </a:solidFill>
@@ -6969,21 +7250,21 @@
                 <a:ea typeface="微软雅黑"/>
                 <a:cs typeface="微软雅黑"/>
               </a:rPr>
-              <a:t>!</a:t>
-            </a:r>
-          </a:p>
-        </p:txBody>
-      </p:sp>
-      <p:sp>
-        <p:nvSpPr>
-          <p:cNvPr id="13" name="TextBox 12"/>
+              <a:t>2</a:t>
+            </a:r>
+          </a:p>
+        </p:txBody>
+      </p:sp>
+      <p:sp>
+        <p:nvSpPr>
+          <p:cNvPr id="14" name="TextBox 13"/>
           <p:cNvSpPr txBox="1"/>
           <p:nvPr/>
         </p:nvSpPr>
         <p:spPr>
           <a:xfrm>
-            <a:off x="6995160" y="1527048"/>
-            <a:ext cx="4434840" cy="457200"/>
+            <a:off x="5313578" y="2450592"/>
+            <a:ext cx="2296058" cy="731520"/>
           </a:xfrm>
           <a:prstGeom prst="rect">
             <a:avLst/>
@@ -6996,35 +7277,31 @@
           </a:bodyPr>
           <a:lstStyle/>
           <a:p>
-            <a:pPr algn="l">
-              <a:lnSpc>
-                <a:spcPct val="110000"/>
-              </a:lnSpc>
-            </a:pPr>
-            <a:r>
-              <a:rPr sz="1600" b="1">
-                <a:solidFill>
-                  <a:srgbClr val="1C2A33"/>
-                </a:solidFill>
-                <a:latin typeface="微软雅黑"/>
-                <a:ea typeface="微软雅黑"/>
-                <a:cs typeface="微软雅黑"/>
-              </a:rPr>
-              <a:t/>
-            </a:r>
-          </a:p>
-        </p:txBody>
-      </p:sp>
-      <p:sp>
-        <p:nvSpPr>
-          <p:cNvPr id="14" name="TextBox 13"/>
+            <a:pPr algn="l"/>
+            <a:r>
+              <a:rPr sz="1400" b="1">
+                <a:solidFill>
+                  <a:srgbClr val="6B6258"/>
+                </a:solidFill>
+                <a:latin typeface="楷体"/>
+                <a:ea typeface="楷体"/>
+                <a:cs typeface="楷体"/>
+              </a:rPr>
+              <a:t>易卡处</a:t>
+            </a:r>
+          </a:p>
+        </p:txBody>
+      </p:sp>
+      <p:sp>
+        <p:nvSpPr>
+          <p:cNvPr id="15" name="TextBox 14"/>
           <p:cNvSpPr txBox="1"/>
           <p:nvPr/>
         </p:nvSpPr>
         <p:spPr>
           <a:xfrm>
-            <a:off x="6995160" y="1965960"/>
-            <a:ext cx="4434840" cy="1417320"/>
+            <a:off x="4673498" y="3200400"/>
+            <a:ext cx="2844698" cy="2743200"/>
           </a:xfrm>
           <a:prstGeom prst="rect">
             <a:avLst/>
@@ -7039,7 +7316,7 @@
           <a:p>
             <a:pPr algn="l">
               <a:lnSpc>
-                <a:spcPct val="128000"/>
+                <a:spcPct val="150000"/>
               </a:lnSpc>
             </a:pPr>
             <a:r>
@@ -7058,14 +7335,14 @@
       </p:sp>
       <p:sp>
         <p:nvSpPr>
-          <p:cNvPr id="15" name="Rounded Rectangle 14"/>
+          <p:cNvPr id="16" name="Rounded Rectangle 15"/>
           <p:cNvSpPr/>
           <p:nvPr/>
         </p:nvSpPr>
         <p:spPr>
           <a:xfrm>
-            <a:off x="640080" y="3703320"/>
-            <a:ext cx="5349240" cy="2057400"/>
+            <a:off x="8158276" y="2194560"/>
+            <a:ext cx="3393338" cy="3931920"/>
           </a:xfrm>
           <a:prstGeom prst="roundRect">
             <a:avLst/>
@@ -7073,9 +7350,9 @@
           <a:solidFill>
             <a:srgbClr val="FFFFFF"/>
           </a:solidFill>
-          <a:ln w="22860">
+          <a:ln w="20320">
             <a:solidFill>
-              <a:srgbClr val="B23A2A"/>
+              <a:srgbClr val="C8A86B"/>
             </a:solidFill>
           </a:ln>
           <a:effectLst/>
@@ -7104,20 +7381,20 @@
       </p:sp>
       <p:sp>
         <p:nvSpPr>
-          <p:cNvPr id="16" name="Oval 15"/>
+          <p:cNvPr id="17" name="Oval 16"/>
           <p:cNvSpPr/>
           <p:nvPr/>
         </p:nvSpPr>
         <p:spPr>
           <a:xfrm>
-            <a:off x="804672" y="3867912"/>
-            <a:ext cx="457200" cy="457200"/>
+            <a:off x="8386876" y="2423160"/>
+            <a:ext cx="548640" cy="548640"/>
           </a:xfrm>
           <a:prstGeom prst="ellipse">
             <a:avLst/>
           </a:prstGeom>
           <a:solidFill>
-            <a:srgbClr val="B23A2A"/>
+            <a:srgbClr val="C8A86B"/>
           </a:solidFill>
           <a:ln>
             <a:noFill/>
@@ -7148,14 +7425,14 @@
       </p:sp>
       <p:sp>
         <p:nvSpPr>
-          <p:cNvPr id="17" name="TextBox 16"/>
+          <p:cNvPr id="18" name="TextBox 17"/>
           <p:cNvSpPr txBox="1"/>
           <p:nvPr/>
         </p:nvSpPr>
         <p:spPr>
           <a:xfrm>
-            <a:off x="804672" y="3922776"/>
-            <a:ext cx="457200" cy="384048"/>
+            <a:off x="8386876" y="2487168"/>
+            <a:ext cx="548640" cy="411480"/>
           </a:xfrm>
           <a:prstGeom prst="rect">
             <a:avLst/>
@@ -7170,7 +7447,7 @@
           <a:p>
             <a:pPr algn="ctr"/>
             <a:r>
-              <a:rPr sz="1600" b="1">
+              <a:rPr sz="2000" b="1">
                 <a:solidFill>
                   <a:srgbClr val="FFFFFF"/>
                 </a:solidFill>
@@ -7178,21 +7455,21 @@
                 <a:ea typeface="微软雅黑"/>
                 <a:cs typeface="微软雅黑"/>
               </a:rPr>
-              <a:t>!</a:t>
-            </a:r>
-          </a:p>
-        </p:txBody>
-      </p:sp>
-      <p:sp>
-        <p:nvSpPr>
-          <p:cNvPr id="18" name="TextBox 17"/>
+              <a:t>3</a:t>
+            </a:r>
+          </a:p>
+        </p:txBody>
+      </p:sp>
+      <p:sp>
+        <p:nvSpPr>
+          <p:cNvPr id="19" name="TextBox 18"/>
           <p:cNvSpPr txBox="1"/>
           <p:nvPr/>
         </p:nvSpPr>
         <p:spPr>
           <a:xfrm>
-            <a:off x="1371600" y="3813048"/>
-            <a:ext cx="4434840" cy="457200"/>
+            <a:off x="9072676" y="2450592"/>
+            <a:ext cx="2296058" cy="731520"/>
           </a:xfrm>
           <a:prstGeom prst="rect">
             <a:avLst/>
@@ -7205,35 +7482,31 @@
           </a:bodyPr>
           <a:lstStyle/>
           <a:p>
-            <a:pPr algn="l">
-              <a:lnSpc>
-                <a:spcPct val="110000"/>
-              </a:lnSpc>
-            </a:pPr>
-            <a:r>
-              <a:rPr sz="1600" b="1">
-                <a:solidFill>
-                  <a:srgbClr val="1C2A33"/>
-                </a:solidFill>
-                <a:latin typeface="微软雅黑"/>
-                <a:ea typeface="微软雅黑"/>
-                <a:cs typeface="微软雅黑"/>
-              </a:rPr>
-              <a:t/>
-            </a:r>
-          </a:p>
-        </p:txBody>
-      </p:sp>
-      <p:sp>
-        <p:nvSpPr>
-          <p:cNvPr id="19" name="TextBox 18"/>
+            <a:pPr algn="l"/>
+            <a:r>
+              <a:rPr sz="1400" b="1">
+                <a:solidFill>
+                  <a:srgbClr val="6B6258"/>
+                </a:solidFill>
+                <a:latin typeface="楷体"/>
+                <a:ea typeface="楷体"/>
+                <a:cs typeface="楷体"/>
+              </a:rPr>
+              <a:t>易卡处</a:t>
+            </a:r>
+          </a:p>
+        </p:txBody>
+      </p:sp>
+      <p:sp>
+        <p:nvSpPr>
+          <p:cNvPr id="20" name="TextBox 19"/>
           <p:cNvSpPr txBox="1"/>
           <p:nvPr/>
         </p:nvSpPr>
         <p:spPr>
           <a:xfrm>
-            <a:off x="1371600" y="4251960"/>
-            <a:ext cx="4434840" cy="1417320"/>
+            <a:off x="8432596" y="3200400"/>
+            <a:ext cx="2844698" cy="2743200"/>
           </a:xfrm>
           <a:prstGeom prst="rect">
             <a:avLst/>
@@ -7248,7 +7521,7 @@
           <a:p>
             <a:pPr algn="l">
               <a:lnSpc>
-                <a:spcPct val="128000"/>
+                <a:spcPct val="150000"/>
               </a:lnSpc>
             </a:pPr>
             <a:r>
@@ -7267,7 +7540,7 @@
       </p:sp>
       <p:sp>
         <p:nvSpPr>
-          <p:cNvPr id="20" name="TextBox 19"/>
+          <p:cNvPr id="21" name="TextBox 20"/>
           <p:cNvSpPr txBox="1"/>
           <p:nvPr/>
         </p:nvSpPr>
@@ -7394,13 +7667,13 @@
             <a:r>
               <a:rPr sz="1300" b="1">
                 <a:solidFill>
-                  <a:srgbClr val="C8A86B"/>
+                  <a:srgbClr val="B23A2A"/>
                 </a:solidFill>
                 <a:latin typeface="微软雅黑"/>
                 <a:ea typeface="微软雅黑"/>
                 <a:cs typeface="微软雅黑"/>
               </a:rPr>
-              <a:t>要点板书</a:t>
+              <a:t>板书精华</a:t>
             </a:r>
           </a:p>
         </p:txBody>
@@ -7420,7 +7693,7 @@
             <a:avLst/>
           </a:prstGeom>
           <a:solidFill>
-            <a:srgbClr val="C8A86B"/>
+            <a:srgbClr val="B23A2A"/>
           </a:solidFill>
           <a:ln>
             <a:noFill/>
@@ -7451,14 +7724,51 @@
       </p:sp>
       <p:sp>
         <p:nvSpPr>
-          <p:cNvPr id="5" name="Rounded Rectangle 4"/>
+          <p:cNvPr id="5" name="TextBox 4"/>
+          <p:cNvSpPr txBox="1"/>
+          <p:nvPr/>
+        </p:nvSpPr>
+        <p:spPr>
+          <a:xfrm>
+            <a:off x="640080" y="1325880"/>
+            <a:ext cx="10515600" cy="548640"/>
+          </a:xfrm>
+          <a:prstGeom prst="rect">
+            <a:avLst/>
+          </a:prstGeom>
+          <a:noFill/>
+        </p:spPr>
+        <p:txBody>
+          <a:bodyPr wrap="square" anchor="t" lIns="0" rIns="0" tIns="0" bIns="0">
+            <a:spAutoFit/>
+          </a:bodyPr>
+          <a:lstStyle/>
+          <a:p>
+            <a:pPr algn="l"/>
+            <a:r>
+              <a:rPr sz="2800" b="1">
+                <a:solidFill>
+                  <a:srgbClr val="1C2A33"/>
+                </a:solidFill>
+                <a:latin typeface="楷体"/>
+                <a:ea typeface="楷体"/>
+                <a:cs typeface="楷体"/>
+              </a:rPr>
+              <a:t>板书精华</a:t>
+            </a:r>
+          </a:p>
+        </p:txBody>
+      </p:sp>
+      <p:sp>
+        <p:nvSpPr>
+          <p:cNvPr id="6" name="Rounded Rectangle 5"/>
           <p:cNvSpPr/>
           <p:nvPr/>
         </p:nvSpPr>
         <p:spPr>
           <a:xfrm>
-            <a:off x="640080" y="1417320"/>
-            <a:ext cx="10911535" cy="5394960"/>
+            <a:off x="640080" y="2057400"/>
+            <a:ext cx="10911535" cy="4297680"/>
           </a:xfrm>
           <a:prstGeom prst="roundRect">
             <a:avLst/>
@@ -7466,9 +7776,9 @@
           <a:solidFill>
             <a:srgbClr val="FFFFFF"/>
           </a:solidFill>
-          <a:ln w="25400">
+          <a:ln w="12700">
             <a:solidFill>
-              <a:srgbClr val="C8A86B"/>
+              <a:srgbClr val="6B6258"/>
             </a:solidFill>
           </a:ln>
           <a:effectLst/>
@@ -7497,14 +7807,14 @@
       </p:sp>
       <p:sp>
         <p:nvSpPr>
-          <p:cNvPr id="6" name="TextBox 5"/>
+          <p:cNvPr id="7" name="TextBox 6"/>
           <p:cNvSpPr txBox="1"/>
           <p:nvPr/>
         </p:nvSpPr>
         <p:spPr>
           <a:xfrm>
-            <a:off x="914400" y="1554480"/>
-            <a:ext cx="10362895" cy="5120640"/>
+            <a:off x="1005840" y="2286000"/>
+            <a:ext cx="10180015" cy="3840480"/>
           </a:xfrm>
           <a:prstGeom prst="rect">
             <a:avLst/>
@@ -7519,45 +7829,260 @@
           <a:p>
             <a:pPr algn="l">
               <a:lnSpc>
-                <a:spcPct val="110000"/>
+                <a:spcPct val="130000"/>
               </a:lnSpc>
               <a:spcAft>
-                <a:spcPts val="100"/>
+                <a:spcPts val="600"/>
               </a:spcAft>
             </a:pPr>
             <a:r>
-              <a:rPr sz="1300" b="0">
+              <a:rPr sz="1400" b="0">
                 <a:solidFill>
                   <a:srgbClr val="1C2A33"/>
                 </a:solidFill>
-                <a:latin typeface="微软雅黑"/>
-                <a:ea typeface="微软雅黑"/>
-                <a:cs typeface="微软雅黑"/>
-              </a:rPr>
-              <a:t>┌── 鸿门宴·史记 ──┐
-│ 楚汉拐点·一夜 │
-│ │
-│ 情节链: │
-│ 谢罪→举玦→舞剑 │
-│ →闯帐→遁走 │
-│ │
-│ 细节写人: │
-│ 举玦(决·急) │
-│ 舞剑(刺·机) │
-│ 闯帐(忠·勇) │
-│ │
-│ 人物: │
-│ 羽磊愎/邦机变 │
-│ 哙忠勇 │
-│ 实录精神 │
-└────────────────┘</a:t>
-            </a:r>
-          </a:p>
-        </p:txBody>
-      </p:sp>
-      <p:sp>
-        <p:nvSpPr>
-          <p:cNvPr id="7" name="TextBox 6"/>
+                <a:latin typeface="楷体"/>
+                <a:ea typeface="楷体"/>
+                <a:cs typeface="楷体"/>
+              </a:rPr>
+              <a:t>鸿门宴·史记</a:t>
+            </a:r>
+          </a:p>
+          <a:p>
+            <a:pPr algn="l">
+              <a:lnSpc>
+                <a:spcPct val="130000"/>
+              </a:lnSpc>
+              <a:spcAft>
+                <a:spcPts val="600"/>
+              </a:spcAft>
+            </a:pPr>
+            <a:r>
+              <a:rPr sz="1400" b="0">
+                <a:solidFill>
+                  <a:srgbClr val="6B6258"/>
+                </a:solidFill>
+                <a:latin typeface="楷体"/>
+                <a:ea typeface="楷体"/>
+                <a:cs typeface="楷体"/>
+              </a:rPr>
+              <a:t>楚汉拐点·一夜</a:t>
+            </a:r>
+          </a:p>
+          <a:p>
+            <a:pPr algn="l">
+              <a:lnSpc>
+                <a:spcPct val="130000"/>
+              </a:lnSpc>
+              <a:spcAft>
+                <a:spcPts val="600"/>
+              </a:spcAft>
+            </a:pPr>
+            <a:r>
+              <a:rPr sz="1400" b="0">
+                <a:solidFill>
+                  <a:srgbClr val="1C2A33"/>
+                </a:solidFill>
+                <a:latin typeface="楷体"/>
+                <a:ea typeface="楷体"/>
+                <a:cs typeface="楷体"/>
+              </a:rPr>
+              <a:t>情节链:</a:t>
+            </a:r>
+          </a:p>
+          <a:p>
+            <a:pPr algn="l">
+              <a:lnSpc>
+                <a:spcPct val="130000"/>
+              </a:lnSpc>
+              <a:spcAft>
+                <a:spcPts val="600"/>
+              </a:spcAft>
+            </a:pPr>
+            <a:r>
+              <a:rPr sz="1400" b="0">
+                <a:solidFill>
+                  <a:srgbClr val="6B6258"/>
+                </a:solidFill>
+                <a:latin typeface="楷体"/>
+                <a:ea typeface="楷体"/>
+                <a:cs typeface="楷体"/>
+              </a:rPr>
+              <a:t>谢罪→举玦→舞剑</a:t>
+            </a:r>
+          </a:p>
+          <a:p>
+            <a:pPr algn="l">
+              <a:lnSpc>
+                <a:spcPct val="130000"/>
+              </a:lnSpc>
+              <a:spcAft>
+                <a:spcPts val="600"/>
+              </a:spcAft>
+            </a:pPr>
+            <a:r>
+              <a:rPr sz="1400" b="0">
+                <a:solidFill>
+                  <a:srgbClr val="1C2A33"/>
+                </a:solidFill>
+                <a:latin typeface="楷体"/>
+                <a:ea typeface="楷体"/>
+                <a:cs typeface="楷体"/>
+              </a:rPr>
+              <a:t>→闯帐→遁走</a:t>
+            </a:r>
+          </a:p>
+          <a:p>
+            <a:pPr algn="l">
+              <a:lnSpc>
+                <a:spcPct val="130000"/>
+              </a:lnSpc>
+              <a:spcAft>
+                <a:spcPts val="600"/>
+              </a:spcAft>
+            </a:pPr>
+            <a:r>
+              <a:rPr sz="1400" b="0">
+                <a:solidFill>
+                  <a:srgbClr val="6B6258"/>
+                </a:solidFill>
+                <a:latin typeface="楷体"/>
+                <a:ea typeface="楷体"/>
+                <a:cs typeface="楷体"/>
+              </a:rPr>
+              <a:t>细节写人:</a:t>
+            </a:r>
+          </a:p>
+          <a:p>
+            <a:pPr algn="l">
+              <a:lnSpc>
+                <a:spcPct val="130000"/>
+              </a:lnSpc>
+              <a:spcAft>
+                <a:spcPts val="600"/>
+              </a:spcAft>
+            </a:pPr>
+            <a:r>
+              <a:rPr sz="1400" b="0">
+                <a:solidFill>
+                  <a:srgbClr val="1C2A33"/>
+                </a:solidFill>
+                <a:latin typeface="楷体"/>
+                <a:ea typeface="楷体"/>
+                <a:cs typeface="楷体"/>
+              </a:rPr>
+              <a:t>举玦(决·急)</a:t>
+            </a:r>
+          </a:p>
+          <a:p>
+            <a:pPr algn="l">
+              <a:lnSpc>
+                <a:spcPct val="130000"/>
+              </a:lnSpc>
+              <a:spcAft>
+                <a:spcPts val="600"/>
+              </a:spcAft>
+            </a:pPr>
+            <a:r>
+              <a:rPr sz="1400" b="0">
+                <a:solidFill>
+                  <a:srgbClr val="6B6258"/>
+                </a:solidFill>
+                <a:latin typeface="楷体"/>
+                <a:ea typeface="楷体"/>
+                <a:cs typeface="楷体"/>
+              </a:rPr>
+              <a:t>舞剑(刺·机)</a:t>
+            </a:r>
+          </a:p>
+          <a:p>
+            <a:pPr algn="l">
+              <a:lnSpc>
+                <a:spcPct val="130000"/>
+              </a:lnSpc>
+              <a:spcAft>
+                <a:spcPts val="600"/>
+              </a:spcAft>
+            </a:pPr>
+            <a:r>
+              <a:rPr sz="1400" b="0">
+                <a:solidFill>
+                  <a:srgbClr val="1C2A33"/>
+                </a:solidFill>
+                <a:latin typeface="楷体"/>
+                <a:ea typeface="楷体"/>
+                <a:cs typeface="楷体"/>
+              </a:rPr>
+              <a:t>闯帐(忠·勇)</a:t>
+            </a:r>
+          </a:p>
+          <a:p>
+            <a:pPr algn="l">
+              <a:lnSpc>
+                <a:spcPct val="130000"/>
+              </a:lnSpc>
+              <a:spcAft>
+                <a:spcPts val="600"/>
+              </a:spcAft>
+            </a:pPr>
+            <a:r>
+              <a:rPr sz="1400" b="0">
+                <a:solidFill>
+                  <a:srgbClr val="6B6258"/>
+                </a:solidFill>
+                <a:latin typeface="楷体"/>
+                <a:ea typeface="楷体"/>
+                <a:cs typeface="楷体"/>
+              </a:rPr>
+              <a:t>人物:</a:t>
+            </a:r>
+          </a:p>
+          <a:p>
+            <a:pPr algn="l">
+              <a:lnSpc>
+                <a:spcPct val="130000"/>
+              </a:lnSpc>
+              <a:spcAft>
+                <a:spcPts val="600"/>
+              </a:spcAft>
+            </a:pPr>
+            <a:r>
+              <a:rPr sz="1400" b="0">
+                <a:solidFill>
+                  <a:srgbClr val="1C2A33"/>
+                </a:solidFill>
+                <a:latin typeface="楷体"/>
+                <a:ea typeface="楷体"/>
+                <a:cs typeface="楷体"/>
+              </a:rPr>
+              <a:t>羽磊愎/邦机变</a:t>
+            </a:r>
+          </a:p>
+          <a:p>
+            <a:pPr algn="l">
+              <a:lnSpc>
+                <a:spcPct val="130000"/>
+              </a:lnSpc>
+              <a:spcAft>
+                <a:spcPts val="600"/>
+              </a:spcAft>
+            </a:pPr>
+            <a:r>
+              <a:rPr sz="1400" b="0">
+                <a:solidFill>
+                  <a:srgbClr val="6B6258"/>
+                </a:solidFill>
+                <a:latin typeface="楷体"/>
+                <a:ea typeface="楷体"/>
+                <a:cs typeface="楷体"/>
+              </a:rPr>
+              <a:t>哙忠勇</a:t>
+            </a:r>
+          </a:p>
+        </p:txBody>
+      </p:sp>
+      <p:sp>
+        <p:nvSpPr>
+          <p:cNvPr id="8" name="TextBox 7"/>
           <p:cNvSpPr txBox="1"/>
           <p:nvPr/>
         </p:nvSpPr>
@@ -7684,13 +8209,13 @@
             <a:r>
               <a:rPr sz="1300" b="1">
                 <a:solidFill>
-                  <a:srgbClr val="2E7D6B"/>
+                  <a:srgbClr val="B23A2A"/>
                 </a:solidFill>
                 <a:latin typeface="微软雅黑"/>
                 <a:ea typeface="微软雅黑"/>
                 <a:cs typeface="微软雅黑"/>
               </a:rPr>
-              <a:t>分层作业</a:t>
+              <a:t>作业</a:t>
             </a:r>
           </a:p>
         </p:txBody>
@@ -7705,6 +8230,325 @@
           <a:xfrm>
             <a:off x="640080" y="1097280"/>
             <a:ext cx="822960" cy="30480"/>
+          </a:xfrm>
+          <a:prstGeom prst="rect">
+            <a:avLst/>
+          </a:prstGeom>
+          <a:solidFill>
+            <a:srgbClr val="B23A2A"/>
+          </a:solidFill>
+          <a:ln>
+            <a:noFill/>
+          </a:ln>
+          <a:effectLst/>
+        </p:spPr>
+        <p:style>
+          <a:lnRef idx="1">
+            <a:schemeClr val="accent1"/>
+          </a:lnRef>
+          <a:fillRef idx="3">
+            <a:schemeClr val="accent1"/>
+          </a:fillRef>
+          <a:effectRef idx="2">
+            <a:schemeClr val="accent1"/>
+          </a:effectRef>
+          <a:fontRef idx="minor">
+            <a:schemeClr val="lt1"/>
+          </a:fontRef>
+        </p:style>
+        <p:txBody>
+          <a:bodyPr rtlCol="0" anchor="ctr"/>
+          <a:lstStyle/>
+          <a:p>
+            <a:pPr algn="ctr"/>
+          </a:p>
+        </p:txBody>
+      </p:sp>
+      <p:sp>
+        <p:nvSpPr>
+          <p:cNvPr id="5" name="TextBox 4"/>
+          <p:cNvSpPr txBox="1"/>
+          <p:nvPr/>
+        </p:nvSpPr>
+        <p:spPr>
+          <a:xfrm>
+            <a:off x="640080" y="1325880"/>
+            <a:ext cx="10058400" cy="548640"/>
+          </a:xfrm>
+          <a:prstGeom prst="rect">
+            <a:avLst/>
+          </a:prstGeom>
+          <a:noFill/>
+        </p:spPr>
+        <p:txBody>
+          <a:bodyPr wrap="square" anchor="t" lIns="0" rIns="0" tIns="0" bIns="0">
+            <a:spAutoFit/>
+          </a:bodyPr>
+          <a:lstStyle/>
+          <a:p>
+            <a:pPr algn="l"/>
+            <a:r>
+              <a:rPr sz="2800" b="1">
+                <a:solidFill>
+                  <a:srgbClr val="1C2A33"/>
+                </a:solidFill>
+                <a:latin typeface="楷体"/>
+                <a:ea typeface="楷体"/>
+                <a:cs typeface="楷体"/>
+              </a:rPr>
+              <a:t>分层作业</a:t>
+            </a:r>
+          </a:p>
+        </p:txBody>
+      </p:sp>
+      <p:sp>
+        <p:nvSpPr>
+          <p:cNvPr id="6" name="Rounded Rectangle 5"/>
+          <p:cNvSpPr/>
+          <p:nvPr/>
+        </p:nvSpPr>
+        <p:spPr>
+          <a:xfrm>
+            <a:off x="640080" y="2194560"/>
+            <a:ext cx="5272887" cy="3931920"/>
+          </a:xfrm>
+          <a:prstGeom prst="roundRect">
+            <a:avLst/>
+          </a:prstGeom>
+          <a:solidFill>
+            <a:srgbClr val="FFFFFF"/>
+          </a:solidFill>
+          <a:ln w="20320">
+            <a:solidFill>
+              <a:srgbClr val="B23A2A"/>
+            </a:solidFill>
+          </a:ln>
+          <a:effectLst/>
+        </p:spPr>
+        <p:style>
+          <a:lnRef idx="1">
+            <a:schemeClr val="accent1"/>
+          </a:lnRef>
+          <a:fillRef idx="3">
+            <a:schemeClr val="accent1"/>
+          </a:fillRef>
+          <a:effectRef idx="2">
+            <a:schemeClr val="accent1"/>
+          </a:effectRef>
+          <a:fontRef idx="minor">
+            <a:schemeClr val="lt1"/>
+          </a:fontRef>
+        </p:style>
+        <p:txBody>
+          <a:bodyPr rtlCol="0" anchor="ctr"/>
+          <a:lstStyle/>
+          <a:p>
+            <a:pPr algn="ctr"/>
+          </a:p>
+        </p:txBody>
+      </p:sp>
+      <p:sp>
+        <p:nvSpPr>
+          <p:cNvPr id="7" name="Rectangle 6"/>
+          <p:cNvSpPr/>
+          <p:nvPr/>
+        </p:nvSpPr>
+        <p:spPr>
+          <a:xfrm>
+            <a:off x="640080" y="2194560"/>
+            <a:ext cx="5272887" cy="548640"/>
+          </a:xfrm>
+          <a:prstGeom prst="rect">
+            <a:avLst/>
+          </a:prstGeom>
+          <a:solidFill>
+            <a:srgbClr val="B23A2A"/>
+          </a:solidFill>
+          <a:ln>
+            <a:noFill/>
+          </a:ln>
+          <a:effectLst/>
+        </p:spPr>
+        <p:style>
+          <a:lnRef idx="1">
+            <a:schemeClr val="accent1"/>
+          </a:lnRef>
+          <a:fillRef idx="3">
+            <a:schemeClr val="accent1"/>
+          </a:fillRef>
+          <a:effectRef idx="2">
+            <a:schemeClr val="accent1"/>
+          </a:effectRef>
+          <a:fontRef idx="minor">
+            <a:schemeClr val="lt1"/>
+          </a:fontRef>
+        </p:style>
+        <p:txBody>
+          <a:bodyPr rtlCol="0" anchor="ctr"/>
+          <a:lstStyle/>
+          <a:p>
+            <a:pPr algn="ctr"/>
+          </a:p>
+        </p:txBody>
+      </p:sp>
+      <p:sp>
+        <p:nvSpPr>
+          <p:cNvPr id="8" name="TextBox 7"/>
+          <p:cNvSpPr txBox="1"/>
+          <p:nvPr/>
+        </p:nvSpPr>
+        <p:spPr>
+          <a:xfrm>
+            <a:off x="640080" y="2304288"/>
+            <a:ext cx="5272887" cy="365760"/>
+          </a:xfrm>
+          <a:prstGeom prst="rect">
+            <a:avLst/>
+          </a:prstGeom>
+          <a:noFill/>
+        </p:spPr>
+        <p:txBody>
+          <a:bodyPr wrap="square" anchor="t" lIns="0" rIns="0" tIns="0" bIns="0">
+            <a:spAutoFit/>
+          </a:bodyPr>
+          <a:lstStyle/>
+          <a:p>
+            <a:pPr algn="ctr"/>
+            <a:r>
+              <a:rPr sz="1600" b="1">
+                <a:solidFill>
+                  <a:srgbClr val="FFFFFF"/>
+                </a:solidFill>
+                <a:latin typeface="微软雅黑"/>
+                <a:ea typeface="微软雅黑"/>
+                <a:cs typeface="微软雅黑"/>
+              </a:rPr>
+              <a:t>基础 · 必做</a:t>
+            </a:r>
+          </a:p>
+        </p:txBody>
+      </p:sp>
+      <p:sp>
+        <p:nvSpPr>
+          <p:cNvPr id="9" name="TextBox 8"/>
+          <p:cNvSpPr txBox="1"/>
+          <p:nvPr/>
+        </p:nvSpPr>
+        <p:spPr>
+          <a:xfrm>
+            <a:off x="914400" y="2971800"/>
+            <a:ext cx="4724247" cy="3017520"/>
+          </a:xfrm>
+          <a:prstGeom prst="rect">
+            <a:avLst/>
+          </a:prstGeom>
+          <a:noFill/>
+        </p:spPr>
+        <p:txBody>
+          <a:bodyPr wrap="square" anchor="t" lIns="0" rIns="0" tIns="0" bIns="0">
+            <a:spAutoFit/>
+          </a:bodyPr>
+          <a:lstStyle/>
+          <a:p>
+            <a:pPr algn="l">
+              <a:lnSpc>
+                <a:spcPct val="150000"/>
+              </a:lnSpc>
+              <a:spcAft>
+                <a:spcPts val="600"/>
+              </a:spcAft>
+            </a:pPr>
+            <a:r>
+              <a:rPr sz="1350" b="0">
+                <a:solidFill>
+                  <a:srgbClr val="1C2A33"/>
+                </a:solidFill>
+                <a:latin typeface="楷体"/>
+                <a:ea typeface="楷体"/>
+                <a:cs typeface="楷体"/>
+              </a:rPr>
+              <a:t>· 1. 写出鸿门宴情节五节点</a:t>
+            </a:r>
+          </a:p>
+          <a:p>
+            <a:pPr algn="l">
+              <a:lnSpc>
+                <a:spcPct val="150000"/>
+              </a:lnSpc>
+              <a:spcAft>
+                <a:spcPts val="600"/>
+              </a:spcAft>
+            </a:pPr>
+            <a:r>
+              <a:rPr sz="1350" b="0">
+                <a:solidFill>
+                  <a:srgbClr val="1C2A33"/>
+                </a:solidFill>
+                <a:latin typeface="楷体"/>
+                <a:ea typeface="楷体"/>
+                <a:cs typeface="楷体"/>
+              </a:rPr>
+              <a:t>· 2. 说项羽、刘邦性格各一关键词</a:t>
+            </a:r>
+          </a:p>
+        </p:txBody>
+      </p:sp>
+      <p:sp>
+        <p:nvSpPr>
+          <p:cNvPr id="10" name="Rounded Rectangle 9"/>
+          <p:cNvSpPr/>
+          <p:nvPr/>
+        </p:nvSpPr>
+        <p:spPr>
+          <a:xfrm>
+            <a:off x="6278727" y="2194560"/>
+            <a:ext cx="5272887" cy="3931920"/>
+          </a:xfrm>
+          <a:prstGeom prst="roundRect">
+            <a:avLst/>
+          </a:prstGeom>
+          <a:solidFill>
+            <a:srgbClr val="FFFFFF"/>
+          </a:solidFill>
+          <a:ln w="20320">
+            <a:solidFill>
+              <a:srgbClr val="2E7D6B"/>
+            </a:solidFill>
+          </a:ln>
+          <a:effectLst/>
+        </p:spPr>
+        <p:style>
+          <a:lnRef idx="1">
+            <a:schemeClr val="accent1"/>
+          </a:lnRef>
+          <a:fillRef idx="3">
+            <a:schemeClr val="accent1"/>
+          </a:fillRef>
+          <a:effectRef idx="2">
+            <a:schemeClr val="accent1"/>
+          </a:effectRef>
+          <a:fontRef idx="minor">
+            <a:schemeClr val="lt1"/>
+          </a:fontRef>
+        </p:style>
+        <p:txBody>
+          <a:bodyPr rtlCol="0" anchor="ctr"/>
+          <a:lstStyle/>
+          <a:p>
+            <a:pPr algn="ctr"/>
+          </a:p>
+        </p:txBody>
+      </p:sp>
+      <p:sp>
+        <p:nvSpPr>
+          <p:cNvPr id="11" name="Rectangle 10"/>
+          <p:cNvSpPr/>
+          <p:nvPr/>
+        </p:nvSpPr>
+        <p:spPr>
+          <a:xfrm>
+            <a:off x="6278727" y="2194560"/>
+            <a:ext cx="5272887" cy="548640"/>
           </a:xfrm>
           <a:prstGeom prst="rect">
             <a:avLst/>
@@ -7741,60 +8585,14 @@
       </p:sp>
       <p:sp>
         <p:nvSpPr>
-          <p:cNvPr id="5" name="Rounded Rectangle 4"/>
-          <p:cNvSpPr/>
-          <p:nvPr/>
-        </p:nvSpPr>
-        <p:spPr>
-          <a:xfrm>
-            <a:off x="640080" y="1417320"/>
-            <a:ext cx="10911535" cy="1417320"/>
-          </a:xfrm>
-          <a:prstGeom prst="roundRect">
-            <a:avLst/>
-          </a:prstGeom>
-          <a:solidFill>
-            <a:srgbClr val="FFFFFF"/>
-          </a:solidFill>
-          <a:ln w="22860">
-            <a:solidFill>
-              <a:srgbClr val="2E7D6B"/>
-            </a:solidFill>
-          </a:ln>
-          <a:effectLst/>
-        </p:spPr>
-        <p:style>
-          <a:lnRef idx="1">
-            <a:schemeClr val="accent1"/>
-          </a:lnRef>
-          <a:fillRef idx="3">
-            <a:schemeClr val="accent1"/>
-          </a:fillRef>
-          <a:effectRef idx="2">
-            <a:schemeClr val="accent1"/>
-          </a:effectRef>
-          <a:fontRef idx="minor">
-            <a:schemeClr val="lt1"/>
-          </a:fontRef>
-        </p:style>
-        <p:txBody>
-          <a:bodyPr rtlCol="0" anchor="ctr"/>
-          <a:lstStyle/>
-          <a:p>
-            <a:pPr algn="ctr"/>
-          </a:p>
-        </p:txBody>
-      </p:sp>
-      <p:sp>
-        <p:nvSpPr>
-          <p:cNvPr id="6" name="TextBox 5"/>
+          <p:cNvPr id="12" name="TextBox 11"/>
           <p:cNvSpPr txBox="1"/>
           <p:nvPr/>
         </p:nvSpPr>
         <p:spPr>
           <a:xfrm>
-            <a:off x="1371600" y="1527048"/>
-            <a:ext cx="9997135" cy="457200"/>
+            <a:off x="6278727" y="2304288"/>
+            <a:ext cx="5272887" cy="365760"/>
           </a:xfrm>
           <a:prstGeom prst="rect">
             <a:avLst/>
@@ -7807,35 +8605,31 @@
           </a:bodyPr>
           <a:lstStyle/>
           <a:p>
-            <a:pPr algn="l">
-              <a:lnSpc>
-                <a:spcPct val="110000"/>
-              </a:lnSpc>
-            </a:pPr>
+            <a:pPr algn="ctr"/>
             <a:r>
               <a:rPr sz="1600" b="1">
                 <a:solidFill>
-                  <a:srgbClr val="1C2A33"/>
+                  <a:srgbClr val="FFFFFF"/>
                 </a:solidFill>
                 <a:latin typeface="微软雅黑"/>
                 <a:ea typeface="微软雅黑"/>
                 <a:cs typeface="微软雅黑"/>
               </a:rPr>
-              <a:t/>
-            </a:r>
-          </a:p>
-        </p:txBody>
-      </p:sp>
-      <p:sp>
-        <p:nvSpPr>
-          <p:cNvPr id="7" name="TextBox 6"/>
+              <a:t>提高 · 选做</a:t>
+            </a:r>
+          </a:p>
+        </p:txBody>
+      </p:sp>
+      <p:sp>
+        <p:nvSpPr>
+          <p:cNvPr id="13" name="TextBox 12"/>
           <p:cNvSpPr txBox="1"/>
           <p:nvPr/>
         </p:nvSpPr>
         <p:spPr>
           <a:xfrm>
-            <a:off x="1371600" y="1965960"/>
-            <a:ext cx="9997135" cy="777240"/>
+            <a:off x="6553047" y="2971800"/>
+            <a:ext cx="4724247" cy="3017520"/>
           </a:xfrm>
           <a:prstGeom prst="rect">
             <a:avLst/>
@@ -7850,11 +8644,14 @@
           <a:p>
             <a:pPr algn="l">
               <a:lnSpc>
-                <a:spcPct val="128000"/>
+                <a:spcPct val="150000"/>
               </a:lnSpc>
+              <a:spcAft>
+                <a:spcPts val="600"/>
+              </a:spcAft>
             </a:pPr>
             <a:r>
-              <a:rPr sz="1400" b="0">
+              <a:rPr sz="1350" b="0">
                 <a:solidFill>
                   <a:srgbClr val="1C2A33"/>
                 </a:solidFill>
@@ -7862,142 +8659,14 @@
                 <a:ea typeface="楷体"/>
                 <a:cs typeface="楷体"/>
               </a:rPr>
-              <a:t>【基础作业】1. 写出鸿门宴情节五节点。2. 说项羽、刘邦性格各一关键词。</a:t>
-            </a:r>
-          </a:p>
-        </p:txBody>
-      </p:sp>
-      <p:sp>
-        <p:nvSpPr>
-          <p:cNvPr id="8" name="Rounded Rectangle 7"/>
-          <p:cNvSpPr/>
-          <p:nvPr/>
-        </p:nvSpPr>
-        <p:spPr>
-          <a:xfrm>
-            <a:off x="640080" y="2971800"/>
-            <a:ext cx="10911535" cy="1417320"/>
-          </a:xfrm>
-          <a:prstGeom prst="roundRect">
-            <a:avLst/>
-          </a:prstGeom>
-          <a:solidFill>
-            <a:srgbClr val="FFFFFF"/>
-          </a:solidFill>
-          <a:ln w="22860">
-            <a:solidFill>
-              <a:srgbClr val="2E7D6B"/>
-            </a:solidFill>
-          </a:ln>
-          <a:effectLst/>
-        </p:spPr>
-        <p:style>
-          <a:lnRef idx="1">
-            <a:schemeClr val="accent1"/>
-          </a:lnRef>
-          <a:fillRef idx="3">
-            <a:schemeClr val="accent1"/>
-          </a:fillRef>
-          <a:effectRef idx="2">
-            <a:schemeClr val="accent1"/>
-          </a:effectRef>
-          <a:fontRef idx="minor">
-            <a:schemeClr val="lt1"/>
-          </a:fontRef>
-        </p:style>
-        <p:txBody>
-          <a:bodyPr rtlCol="0" anchor="ctr"/>
-          <a:lstStyle/>
-          <a:p>
-            <a:pPr algn="ctr"/>
-          </a:p>
-        </p:txBody>
-      </p:sp>
-      <p:sp>
-        <p:nvSpPr>
-          <p:cNvPr id="9" name="TextBox 8"/>
-          <p:cNvSpPr txBox="1"/>
-          <p:nvPr/>
-        </p:nvSpPr>
-        <p:spPr>
-          <a:xfrm>
-            <a:off x="1371600" y="3081528"/>
-            <a:ext cx="9997135" cy="457200"/>
-          </a:xfrm>
-          <a:prstGeom prst="rect">
-            <a:avLst/>
-          </a:prstGeom>
-          <a:noFill/>
-        </p:spPr>
-        <p:txBody>
-          <a:bodyPr wrap="square" anchor="t" lIns="0" rIns="0" tIns="0" bIns="0">
-            <a:spAutoFit/>
-          </a:bodyPr>
-          <a:lstStyle/>
-          <a:p>
-            <a:pPr algn="l">
-              <a:lnSpc>
-                <a:spcPct val="110000"/>
-              </a:lnSpc>
-            </a:pPr>
-            <a:r>
-              <a:rPr sz="1600" b="1">
-                <a:solidFill>
-                  <a:srgbClr val="1C2A33"/>
-                </a:solidFill>
-                <a:latin typeface="微软雅黑"/>
-                <a:ea typeface="微软雅黑"/>
-                <a:cs typeface="微软雅黑"/>
-              </a:rPr>
-              <a:t/>
-            </a:r>
-          </a:p>
-        </p:txBody>
-      </p:sp>
-      <p:sp>
-        <p:nvSpPr>
-          <p:cNvPr id="10" name="TextBox 9"/>
-          <p:cNvSpPr txBox="1"/>
-          <p:nvPr/>
-        </p:nvSpPr>
-        <p:spPr>
-          <a:xfrm>
-            <a:off x="1371600" y="3520440"/>
-            <a:ext cx="9997135" cy="777240"/>
-          </a:xfrm>
-          <a:prstGeom prst="rect">
-            <a:avLst/>
-          </a:prstGeom>
-          <a:noFill/>
-        </p:spPr>
-        <p:txBody>
-          <a:bodyPr wrap="square" anchor="t" lIns="0" rIns="0" tIns="0" bIns="0">
-            <a:spAutoFit/>
-          </a:bodyPr>
-          <a:lstStyle/>
-          <a:p>
-            <a:pPr algn="l">
-              <a:lnSpc>
-                <a:spcPct val="128000"/>
-              </a:lnSpc>
-            </a:pPr>
-            <a:r>
-              <a:rPr sz="1200" b="0">
-                <a:solidFill>
-                  <a:srgbClr val="1C2A33"/>
-                </a:solidFill>
-                <a:latin typeface="楷体"/>
-                <a:ea typeface="楷体"/>
-                <a:cs typeface="楷体"/>
-              </a:rPr>
-              <a:t>【提高作业】写150字「我眼中的项羽」，要求：①用一细节支撑；②辨磊落与失策；③不脸谱。</a:t>
-            </a:r>
-          </a:p>
-        </p:txBody>
-      </p:sp>
-      <p:sp>
-        <p:nvSpPr>
-          <p:cNvPr id="11" name="TextBox 10"/>
+              <a:t>· 写150字「我眼中的项羽」，要求：①用一细节支撑；②辨磊落与失策；③不脸谱</a:t>
+            </a:r>
+          </a:p>
+        </p:txBody>
+      </p:sp>
+      <p:sp>
+        <p:nvSpPr>
+          <p:cNvPr id="14" name="TextBox 13"/>
           <p:cNvSpPr txBox="1"/>
           <p:nvPr/>
         </p:nvSpPr>
@@ -8124,13 +8793,13 @@
             <a:r>
               <a:rPr sz="1300" b="1">
                 <a:solidFill>
-                  <a:srgbClr val="C8A86B"/>
+                  <a:srgbClr val="B23A2A"/>
                 </a:solidFill>
                 <a:latin typeface="微软雅黑"/>
                 <a:ea typeface="微软雅黑"/>
                 <a:cs typeface="微软雅黑"/>
               </a:rPr>
-              <a:t>本课小结</a:t>
+              <a:t>单元小结</a:t>
             </a:r>
           </a:p>
         </p:txBody>
@@ -8150,7 +8819,7 @@
             <a:avLst/>
           </a:prstGeom>
           <a:solidFill>
-            <a:srgbClr val="C8A86B"/>
+            <a:srgbClr val="B23A2A"/>
           </a:solidFill>
           <a:ln>
             <a:noFill/>
@@ -8181,20 +8850,116 @@
       </p:sp>
       <p:sp>
         <p:nvSpPr>
-          <p:cNvPr id="5" name="Rectangle 4"/>
+          <p:cNvPr id="5" name="TextBox 4"/>
+          <p:cNvSpPr txBox="1"/>
+          <p:nvPr/>
+        </p:nvSpPr>
+        <p:spPr>
+          <a:xfrm>
+            <a:off x="640080" y="1371600"/>
+            <a:ext cx="10972800" cy="822960"/>
+          </a:xfrm>
+          <a:prstGeom prst="rect">
+            <a:avLst/>
+          </a:prstGeom>
+          <a:noFill/>
+        </p:spPr>
+        <p:txBody>
+          <a:bodyPr wrap="square" anchor="t" lIns="0" rIns="0" tIns="0" bIns="0">
+            <a:spAutoFit/>
+          </a:bodyPr>
+          <a:lstStyle/>
+          <a:p>
+            <a:pPr algn="l"/>
+            <a:r>
+              <a:rPr sz="3000" b="1">
+                <a:solidFill>
+                  <a:srgbClr val="1C2A33"/>
+                </a:solidFill>
+                <a:latin typeface="楷体"/>
+                <a:ea typeface="楷体"/>
+                <a:cs typeface="楷体"/>
+              </a:rPr>
+              <a:t>回望《中华传统文化经典》</a:t>
+            </a:r>
+          </a:p>
+        </p:txBody>
+      </p:sp>
+      <p:sp>
+        <p:nvSpPr>
+          <p:cNvPr id="6" name="TextBox 5"/>
+          <p:cNvSpPr txBox="1"/>
+          <p:nvPr/>
+        </p:nvSpPr>
+        <p:spPr>
+          <a:xfrm>
+            <a:off x="640080" y="2331720"/>
+            <a:ext cx="10911535" cy="1280160"/>
+          </a:xfrm>
+          <a:prstGeom prst="rect">
+            <a:avLst/>
+          </a:prstGeom>
+          <a:noFill/>
+        </p:spPr>
+        <p:txBody>
+          <a:bodyPr wrap="square" anchor="t" lIns="0" rIns="0" tIns="0" bIns="0">
+            <a:spAutoFit/>
+          </a:bodyPr>
+          <a:lstStyle/>
+          <a:p>
+            <a:pPr algn="l">
+              <a:spcAft>
+                <a:spcPts val="400"/>
+              </a:spcAft>
+            </a:pPr>
+            <a:r>
+              <a:rPr sz="1600" b="1">
+                <a:solidFill>
+                  <a:srgbClr val="B23A2A"/>
+                </a:solidFill>
+                <a:latin typeface="微软雅黑"/>
+                <a:ea typeface="微软雅黑"/>
+                <a:cs typeface="微软雅黑"/>
+              </a:rPr>
+              <a:t>本课要点回顾</a:t>
+            </a:r>
+          </a:p>
+          <a:p>
+            <a:pPr algn="l">
+              <a:lnSpc>
+                <a:spcPct val="150000"/>
+              </a:lnSpc>
+            </a:pPr>
+            <a:r>
+              <a:rPr sz="1400" b="0">
+                <a:solidFill>
+                  <a:srgbClr val="1C2A33"/>
+                </a:solidFill>
+                <a:latin typeface="楷体"/>
+                <a:ea typeface="楷体"/>
+                <a:cs typeface="楷体"/>
+              </a:rPr>
+              <a:t>① 情节链：谢罪→举玦→舞剑→闯帐→遁走。；② 写人：细节动作（举玦/舞剑/闯帐）。；③ 人物：项羽(磊落刚愎)/刘邦(机变)/樊哙(忠勇)。</a:t>
+            </a:r>
+          </a:p>
+        </p:txBody>
+      </p:sp>
+      <p:sp>
+        <p:nvSpPr>
+          <p:cNvPr id="7" name="Oval 6"/>
           <p:cNvSpPr/>
           <p:nvPr/>
         </p:nvSpPr>
         <p:spPr>
           <a:xfrm>
-            <a:off x="640080" y="1737360"/>
-            <a:ext cx="54864" cy="431800"/>
-          </a:xfrm>
-          <a:prstGeom prst="rect">
+            <a:off x="640080" y="3886200"/>
+            <a:ext cx="457200" cy="457200"/>
+          </a:xfrm>
+          <a:prstGeom prst="ellipse">
             <a:avLst/>
           </a:prstGeom>
           <a:solidFill>
-            <a:srgbClr val="C8A86B"/>
+            <a:srgbClr val="2E7D6B"/>
           </a:solidFill>
           <a:ln>
             <a:noFill/>
@@ -8225,14 +8990,14 @@
       </p:sp>
       <p:sp>
         <p:nvSpPr>
-          <p:cNvPr id="6" name="TextBox 5"/>
+          <p:cNvPr id="8" name="TextBox 7"/>
           <p:cNvSpPr txBox="1"/>
           <p:nvPr/>
         </p:nvSpPr>
         <p:spPr>
           <a:xfrm>
-            <a:off x="868680" y="1645920"/>
-            <a:ext cx="10682935" cy="2194560"/>
+            <a:off x="640080" y="3950208"/>
+            <a:ext cx="457200" cy="365760"/>
           </a:xfrm>
           <a:prstGeom prst="rect">
             <a:avLst/>
@@ -8245,16 +9010,50 @@
           </a:bodyPr>
           <a:lstStyle/>
           <a:p>
+            <a:pPr algn="ctr"/>
+            <a:r>
+              <a:rPr sz="1600" b="1">
+                <a:solidFill>
+                  <a:srgbClr val="FFFFFF"/>
+                </a:solidFill>
+                <a:latin typeface="微软雅黑"/>
+                <a:ea typeface="微软雅黑"/>
+                <a:cs typeface="微软雅黑"/>
+              </a:rPr>
+              <a:t>1</a:t>
+            </a:r>
+          </a:p>
+        </p:txBody>
+      </p:sp>
+      <p:sp>
+        <p:nvSpPr>
+          <p:cNvPr id="9" name="TextBox 8"/>
+          <p:cNvSpPr txBox="1"/>
+          <p:nvPr/>
+        </p:nvSpPr>
+        <p:spPr>
+          <a:xfrm>
+            <a:off x="1280160" y="3840480"/>
+            <a:ext cx="10271455" cy="640080"/>
+          </a:xfrm>
+          <a:prstGeom prst="rect">
+            <a:avLst/>
+          </a:prstGeom>
+          <a:noFill/>
+        </p:spPr>
+        <p:txBody>
+          <a:bodyPr wrap="square" anchor="t" lIns="0" rIns="0" tIns="0" bIns="0">
+            <a:spAutoFit/>
+          </a:bodyPr>
+          <a:lstStyle/>
+          <a:p>
             <a:pPr algn="l">
               <a:lnSpc>
-                <a:spcPct val="150000"/>
+                <a:spcPct val="140000"/>
               </a:lnSpc>
-              <a:spcAft>
-                <a:spcPts val="1000"/>
-              </a:spcAft>
             </a:pPr>
             <a:r>
-              <a:rPr sz="2200" b="0">
+              <a:rPr sz="1500" b="0">
                 <a:solidFill>
                   <a:srgbClr val="1C2A33"/>
                 </a:solidFill>
@@ -8262,28 +9061,258 @@
                 <a:ea typeface="楷体"/>
                 <a:cs typeface="楷体"/>
               </a:rPr>
-              <a:t>本单元主题：中华传统文化经典。把今天学到的方法带进下一篇——自己读、自己想、自己写。</a:t>
-            </a:r>
-          </a:p>
-          <a:p>
-            <a:pPr algn="l"/>
+              <a:t>哪一个概念或人物最触动你？用一句话写下来。</a:t>
+            </a:r>
+          </a:p>
+        </p:txBody>
+      </p:sp>
+      <p:sp>
+        <p:nvSpPr>
+          <p:cNvPr id="10" name="Oval 9"/>
+          <p:cNvSpPr/>
+          <p:nvPr/>
+        </p:nvSpPr>
+        <p:spPr>
+          <a:xfrm>
+            <a:off x="640080" y="4663440"/>
+            <a:ext cx="457200" cy="457200"/>
+          </a:xfrm>
+          <a:prstGeom prst="ellipse">
+            <a:avLst/>
+          </a:prstGeom>
+          <a:solidFill>
+            <a:srgbClr val="2E7D6B"/>
+          </a:solidFill>
+          <a:ln>
+            <a:noFill/>
+          </a:ln>
+          <a:effectLst/>
+        </p:spPr>
+        <p:style>
+          <a:lnRef idx="1">
+            <a:schemeClr val="accent1"/>
+          </a:lnRef>
+          <a:fillRef idx="3">
+            <a:schemeClr val="accent1"/>
+          </a:fillRef>
+          <a:effectRef idx="2">
+            <a:schemeClr val="accent1"/>
+          </a:effectRef>
+          <a:fontRef idx="minor">
+            <a:schemeClr val="lt1"/>
+          </a:fontRef>
+        </p:style>
+        <p:txBody>
+          <a:bodyPr rtlCol="0" anchor="ctr"/>
+          <a:lstStyle/>
+          <a:p>
+            <a:pPr algn="ctr"/>
+          </a:p>
+        </p:txBody>
+      </p:sp>
+      <p:sp>
+        <p:nvSpPr>
+          <p:cNvPr id="11" name="TextBox 10"/>
+          <p:cNvSpPr txBox="1"/>
+          <p:nvPr/>
+        </p:nvSpPr>
+        <p:spPr>
+          <a:xfrm>
+            <a:off x="640080" y="4727448"/>
+            <a:ext cx="457200" cy="365760"/>
+          </a:xfrm>
+          <a:prstGeom prst="rect">
+            <a:avLst/>
+          </a:prstGeom>
+          <a:noFill/>
+        </p:spPr>
+        <p:txBody>
+          <a:bodyPr wrap="square" anchor="t" lIns="0" rIns="0" tIns="0" bIns="0">
+            <a:spAutoFit/>
+          </a:bodyPr>
+          <a:lstStyle/>
+          <a:p>
+            <a:pPr algn="ctr"/>
             <a:r>
               <a:rPr sz="1600" b="1">
                 <a:solidFill>
-                  <a:srgbClr val="B23A2A"/>
+                  <a:srgbClr val="FFFFFF"/>
                 </a:solidFill>
                 <a:latin typeface="微软雅黑"/>
                 <a:ea typeface="微软雅黑"/>
                 <a:cs typeface="微软雅黑"/>
               </a:rPr>
-              <a:t>方法迁移：圈关键信息 → 理事件脉络 → 析人物精神</a:t>
-            </a:r>
-          </a:p>
-        </p:txBody>
-      </p:sp>
-      <p:sp>
-        <p:nvSpPr>
-          <p:cNvPr id="7" name="TextBox 6"/>
+              <a:t>2</a:t>
+            </a:r>
+          </a:p>
+        </p:txBody>
+      </p:sp>
+      <p:sp>
+        <p:nvSpPr>
+          <p:cNvPr id="12" name="TextBox 11"/>
+          <p:cNvSpPr txBox="1"/>
+          <p:nvPr/>
+        </p:nvSpPr>
+        <p:spPr>
+          <a:xfrm>
+            <a:off x="1280160" y="4617720"/>
+            <a:ext cx="10271455" cy="640080"/>
+          </a:xfrm>
+          <a:prstGeom prst="rect">
+            <a:avLst/>
+          </a:prstGeom>
+          <a:noFill/>
+        </p:spPr>
+        <p:txBody>
+          <a:bodyPr wrap="square" anchor="t" lIns="0" rIns="0" tIns="0" bIns="0">
+            <a:spAutoFit/>
+          </a:bodyPr>
+          <a:lstStyle/>
+          <a:p>
+            <a:pPr algn="l">
+              <a:lnSpc>
+                <a:spcPct val="140000"/>
+              </a:lnSpc>
+            </a:pPr>
+            <a:r>
+              <a:rPr sz="1500" b="0">
+                <a:solidFill>
+                  <a:srgbClr val="1C2A33"/>
+                </a:solidFill>
+                <a:latin typeface="楷体"/>
+                <a:ea typeface="楷体"/>
+                <a:cs typeface="楷体"/>
+              </a:rPr>
+              <a:t>把本课学到的方法，套用到下一篇阅读或写作里，会怎样？</a:t>
+            </a:r>
+          </a:p>
+        </p:txBody>
+      </p:sp>
+      <p:sp>
+        <p:nvSpPr>
+          <p:cNvPr id="13" name="Oval 12"/>
+          <p:cNvSpPr/>
+          <p:nvPr/>
+        </p:nvSpPr>
+        <p:spPr>
+          <a:xfrm>
+            <a:off x="640080" y="5440680"/>
+            <a:ext cx="457200" cy="457200"/>
+          </a:xfrm>
+          <a:prstGeom prst="ellipse">
+            <a:avLst/>
+          </a:prstGeom>
+          <a:solidFill>
+            <a:srgbClr val="2E7D6B"/>
+          </a:solidFill>
+          <a:ln>
+            <a:noFill/>
+          </a:ln>
+          <a:effectLst/>
+        </p:spPr>
+        <p:style>
+          <a:lnRef idx="1">
+            <a:schemeClr val="accent1"/>
+          </a:lnRef>
+          <a:fillRef idx="3">
+            <a:schemeClr val="accent1"/>
+          </a:fillRef>
+          <a:effectRef idx="2">
+            <a:schemeClr val="accent1"/>
+          </a:effectRef>
+          <a:fontRef idx="minor">
+            <a:schemeClr val="lt1"/>
+          </a:fontRef>
+        </p:style>
+        <p:txBody>
+          <a:bodyPr rtlCol="0" anchor="ctr"/>
+          <a:lstStyle/>
+          <a:p>
+            <a:pPr algn="ctr"/>
+          </a:p>
+        </p:txBody>
+      </p:sp>
+      <p:sp>
+        <p:nvSpPr>
+          <p:cNvPr id="14" name="TextBox 13"/>
+          <p:cNvSpPr txBox="1"/>
+          <p:nvPr/>
+        </p:nvSpPr>
+        <p:spPr>
+          <a:xfrm>
+            <a:off x="640080" y="5504688"/>
+            <a:ext cx="457200" cy="365760"/>
+          </a:xfrm>
+          <a:prstGeom prst="rect">
+            <a:avLst/>
+          </a:prstGeom>
+          <a:noFill/>
+        </p:spPr>
+        <p:txBody>
+          <a:bodyPr wrap="square" anchor="t" lIns="0" rIns="0" tIns="0" bIns="0">
+            <a:spAutoFit/>
+          </a:bodyPr>
+          <a:lstStyle/>
+          <a:p>
+            <a:pPr algn="ctr"/>
+            <a:r>
+              <a:rPr sz="1600" b="1">
+                <a:solidFill>
+                  <a:srgbClr val="FFFFFF"/>
+                </a:solidFill>
+                <a:latin typeface="微软雅黑"/>
+                <a:ea typeface="微软雅黑"/>
+                <a:cs typeface="微软雅黑"/>
+              </a:rPr>
+              <a:t>3</a:t>
+            </a:r>
+          </a:p>
+        </p:txBody>
+      </p:sp>
+      <p:sp>
+        <p:nvSpPr>
+          <p:cNvPr id="15" name="TextBox 14"/>
+          <p:cNvSpPr txBox="1"/>
+          <p:nvPr/>
+        </p:nvSpPr>
+        <p:spPr>
+          <a:xfrm>
+            <a:off x="1280160" y="5394960"/>
+            <a:ext cx="10271455" cy="640080"/>
+          </a:xfrm>
+          <a:prstGeom prst="rect">
+            <a:avLst/>
+          </a:prstGeom>
+          <a:noFill/>
+        </p:spPr>
+        <p:txBody>
+          <a:bodyPr wrap="square" anchor="t" lIns="0" rIns="0" tIns="0" bIns="0">
+            <a:spAutoFit/>
+          </a:bodyPr>
+          <a:lstStyle/>
+          <a:p>
+            <a:pPr algn="l">
+              <a:lnSpc>
+                <a:spcPct val="140000"/>
+              </a:lnSpc>
+            </a:pPr>
+            <a:r>
+              <a:rPr sz="1500" b="0">
+                <a:solidFill>
+                  <a:srgbClr val="1C2A33"/>
+                </a:solidFill>
+                <a:latin typeface="楷体"/>
+                <a:ea typeface="楷体"/>
+                <a:cs typeface="楷体"/>
+              </a:rPr>
+              <a:t>用三个词概括你对本单元的新认识。</a:t>
+            </a:r>
+          </a:p>
+        </p:txBody>
+      </p:sp>
+      <p:sp>
+        <p:nvSpPr>
+          <p:cNvPr id="16" name="TextBox 15"/>
           <p:cNvSpPr txBox="1"/>
           <p:nvPr/>
         </p:nvSpPr>
